--- a/宣道詩/(宣道詩202) 救主的愛.pptx
+++ b/宣道詩/(宣道詩202) 救主的愛.pptx
@@ -5,22 +5,33 @@
     <p:sldMasterId id="2147483660" r:id="rId1"/>
   </p:sldMasterIdLst>
   <p:notesMasterIdLst>
-    <p:notesMasterId r:id="rId12"/>
+    <p:notesMasterId r:id="rId23"/>
   </p:notesMasterIdLst>
   <p:handoutMasterIdLst>
-    <p:handoutMasterId r:id="rId13"/>
+    <p:handoutMasterId r:id="rId24"/>
   </p:handoutMasterIdLst>
   <p:sldIdLst>
-    <p:sldId id="1605" r:id="rId2"/>
-    <p:sldId id="1606" r:id="rId3"/>
-    <p:sldId id="1607" r:id="rId4"/>
-    <p:sldId id="1608" r:id="rId5"/>
-    <p:sldId id="1609" r:id="rId6"/>
-    <p:sldId id="1610" r:id="rId7"/>
-    <p:sldId id="1611" r:id="rId8"/>
-    <p:sldId id="1612" r:id="rId9"/>
-    <p:sldId id="1613" r:id="rId10"/>
-    <p:sldId id="1614" r:id="rId11"/>
+    <p:sldId id="391" r:id="rId2"/>
+    <p:sldId id="412" r:id="rId3"/>
+    <p:sldId id="599" r:id="rId4"/>
+    <p:sldId id="600" r:id="rId5"/>
+    <p:sldId id="601" r:id="rId6"/>
+    <p:sldId id="602" r:id="rId7"/>
+    <p:sldId id="603" r:id="rId8"/>
+    <p:sldId id="610" r:id="rId9"/>
+    <p:sldId id="611" r:id="rId10"/>
+    <p:sldId id="604" r:id="rId11"/>
+    <p:sldId id="605" r:id="rId12"/>
+    <p:sldId id="612" r:id="rId13"/>
+    <p:sldId id="613" r:id="rId14"/>
+    <p:sldId id="606" r:id="rId15"/>
+    <p:sldId id="607" r:id="rId16"/>
+    <p:sldId id="614" r:id="rId17"/>
+    <p:sldId id="615" r:id="rId18"/>
+    <p:sldId id="608" r:id="rId19"/>
+    <p:sldId id="609" r:id="rId20"/>
+    <p:sldId id="616" r:id="rId21"/>
+    <p:sldId id="617" r:id="rId22"/>
   </p:sldIdLst>
   <p:sldSz cx="12192000" cy="6858000"/>
   <p:notesSz cx="6858000" cy="9144000"/>
@@ -319,6 +330,11 @@
         </p:txBody>
       </p:sp>
     </p:spTree>
+    <p:extLst>
+      <p:ext uri="{BB962C8B-B14F-4D97-AF65-F5344CB8AC3E}">
+        <p14:creationId xmlns:p14="http://schemas.microsoft.com/office/powerpoint/2010/main" val="1"/>
+      </p:ext>
+    </p:extLst>
   </p:cSld>
   <p:clrMap bg1="lt1" tx1="dk1" bg2="lt2" tx2="dk2" accent1="accent1" accent2="accent2" accent3="accent3" accent4="accent4" accent5="accent5" accent6="accent6" hlink="hlink" folHlink="folHlink"/>
 </p:handoutMaster>
@@ -468,38 +484,37 @@
           <a:p>
             <a:pPr lvl="0"/>
             <a:r>
-              <a:rPr lang="zh-TW" altLang="en-US" smtClean="0"/>
+              <a:rPr lang="zh-TW" altLang="en-US"/>
               <a:t>按一下以編輯母片文字樣式</a:t>
             </a:r>
           </a:p>
           <a:p>
             <a:pPr lvl="1"/>
             <a:r>
-              <a:rPr lang="zh-TW" altLang="en-US" smtClean="0"/>
+              <a:rPr lang="zh-TW" altLang="en-US"/>
               <a:t>第二層</a:t>
             </a:r>
           </a:p>
           <a:p>
             <a:pPr lvl="2"/>
             <a:r>
-              <a:rPr lang="zh-TW" altLang="en-US" smtClean="0"/>
+              <a:rPr lang="zh-TW" altLang="en-US"/>
               <a:t>第三層</a:t>
             </a:r>
           </a:p>
           <a:p>
             <a:pPr lvl="3"/>
             <a:r>
-              <a:rPr lang="zh-TW" altLang="en-US" smtClean="0"/>
+              <a:rPr lang="zh-TW" altLang="en-US"/>
               <a:t>第四層</a:t>
             </a:r>
           </a:p>
           <a:p>
             <a:pPr lvl="4"/>
             <a:r>
-              <a:rPr lang="zh-TW" altLang="en-US" smtClean="0"/>
+              <a:rPr lang="zh-TW" altLang="en-US"/>
               <a:t>第五層</a:t>
             </a:r>
-            <a:endParaRPr lang="zh-TW" altLang="en-US"/>
           </a:p>
         </p:txBody>
       </p:sp>
@@ -705,7 +720,7 @@
           <a:lstStyle/>
           <a:p>
             <a:r>
-              <a:rPr lang="en-US" altLang="zh-TW" smtClean="0"/>
+              <a:rPr lang="en-US" altLang="zh-TW"/>
               <a:t>Click to edit Master title style</a:t>
             </a:r>
             <a:endParaRPr lang="zh-TW" altLang="en-US"/>
@@ -824,7 +839,7 @@
           </a:lstStyle>
           <a:p>
             <a:r>
-              <a:rPr lang="en-US" altLang="zh-TW" smtClean="0"/>
+              <a:rPr lang="en-US" altLang="zh-TW"/>
               <a:t>Click to edit Master subtitle style</a:t>
             </a:r>
             <a:endParaRPr lang="zh-TW" altLang="en-US"/>
@@ -947,7 +962,7 @@
           <a:lstStyle/>
           <a:p>
             <a:r>
-              <a:rPr lang="en-US" altLang="zh-TW" smtClean="0"/>
+              <a:rPr lang="en-US" altLang="zh-TW"/>
               <a:t>Click to edit Master title style</a:t>
             </a:r>
             <a:endParaRPr lang="zh-TW" altLang="en-US"/>
@@ -971,35 +986,35 @@
           <a:p>
             <a:pPr lvl="0"/>
             <a:r>
-              <a:rPr lang="en-US" altLang="zh-TW" smtClean="0"/>
+              <a:rPr lang="en-US" altLang="zh-TW"/>
               <a:t>Edit Master text styles</a:t>
             </a:r>
           </a:p>
           <a:p>
             <a:pPr lvl="1"/>
             <a:r>
-              <a:rPr lang="en-US" altLang="zh-TW" smtClean="0"/>
+              <a:rPr lang="en-US" altLang="zh-TW"/>
               <a:t>Second level</a:t>
             </a:r>
           </a:p>
           <a:p>
             <a:pPr lvl="2"/>
             <a:r>
-              <a:rPr lang="en-US" altLang="zh-TW" smtClean="0"/>
+              <a:rPr lang="en-US" altLang="zh-TW"/>
               <a:t>Third level</a:t>
             </a:r>
           </a:p>
           <a:p>
             <a:pPr lvl="3"/>
             <a:r>
-              <a:rPr lang="en-US" altLang="zh-TW" smtClean="0"/>
+              <a:rPr lang="en-US" altLang="zh-TW"/>
               <a:t>Fourth level</a:t>
             </a:r>
           </a:p>
           <a:p>
             <a:pPr lvl="4"/>
             <a:r>
-              <a:rPr lang="en-US" altLang="zh-TW" smtClean="0"/>
+              <a:rPr lang="en-US" altLang="zh-TW"/>
               <a:t>Fifth level</a:t>
             </a:r>
             <a:endParaRPr lang="zh-TW" altLang="en-US"/>
@@ -1127,7 +1142,7 @@
           <a:lstStyle/>
           <a:p>
             <a:r>
-              <a:rPr lang="en-US" altLang="zh-TW" smtClean="0"/>
+              <a:rPr lang="en-US" altLang="zh-TW"/>
               <a:t>Click to edit Master title style</a:t>
             </a:r>
             <a:endParaRPr lang="zh-TW" altLang="en-US"/>
@@ -1156,35 +1171,35 @@
           <a:p>
             <a:pPr lvl="0"/>
             <a:r>
-              <a:rPr lang="en-US" altLang="zh-TW" smtClean="0"/>
+              <a:rPr lang="en-US" altLang="zh-TW"/>
               <a:t>Edit Master text styles</a:t>
             </a:r>
           </a:p>
           <a:p>
             <a:pPr lvl="1"/>
             <a:r>
-              <a:rPr lang="en-US" altLang="zh-TW" smtClean="0"/>
+              <a:rPr lang="en-US" altLang="zh-TW"/>
               <a:t>Second level</a:t>
             </a:r>
           </a:p>
           <a:p>
             <a:pPr lvl="2"/>
             <a:r>
-              <a:rPr lang="en-US" altLang="zh-TW" smtClean="0"/>
+              <a:rPr lang="en-US" altLang="zh-TW"/>
               <a:t>Third level</a:t>
             </a:r>
           </a:p>
           <a:p>
             <a:pPr lvl="3"/>
             <a:r>
-              <a:rPr lang="en-US" altLang="zh-TW" smtClean="0"/>
+              <a:rPr lang="en-US" altLang="zh-TW"/>
               <a:t>Fourth level</a:t>
             </a:r>
           </a:p>
           <a:p>
             <a:pPr lvl="4"/>
             <a:r>
-              <a:rPr lang="en-US" altLang="zh-TW" smtClean="0"/>
+              <a:rPr lang="en-US" altLang="zh-TW"/>
               <a:t>Fifth level</a:t>
             </a:r>
             <a:endParaRPr lang="zh-TW" altLang="en-US"/>
@@ -1307,7 +1322,7 @@
           <a:lstStyle/>
           <a:p>
             <a:r>
-              <a:rPr lang="en-US" altLang="zh-TW" smtClean="0"/>
+              <a:rPr lang="en-US" altLang="zh-TW"/>
               <a:t>Click to edit Master title style</a:t>
             </a:r>
             <a:endParaRPr lang="zh-TW" altLang="en-US"/>
@@ -1331,35 +1346,35 @@
           <a:p>
             <a:pPr lvl="0"/>
             <a:r>
-              <a:rPr lang="en-US" altLang="zh-TW" smtClean="0"/>
+              <a:rPr lang="en-US" altLang="zh-TW"/>
               <a:t>Edit Master text styles</a:t>
             </a:r>
           </a:p>
           <a:p>
             <a:pPr lvl="1"/>
             <a:r>
-              <a:rPr lang="en-US" altLang="zh-TW" smtClean="0"/>
+              <a:rPr lang="en-US" altLang="zh-TW"/>
               <a:t>Second level</a:t>
             </a:r>
           </a:p>
           <a:p>
             <a:pPr lvl="2"/>
             <a:r>
-              <a:rPr lang="en-US" altLang="zh-TW" smtClean="0"/>
+              <a:rPr lang="en-US" altLang="zh-TW"/>
               <a:t>Third level</a:t>
             </a:r>
           </a:p>
           <a:p>
             <a:pPr lvl="3"/>
             <a:r>
-              <a:rPr lang="en-US" altLang="zh-TW" smtClean="0"/>
+              <a:rPr lang="en-US" altLang="zh-TW"/>
               <a:t>Fourth level</a:t>
             </a:r>
           </a:p>
           <a:p>
             <a:pPr lvl="4"/>
             <a:r>
-              <a:rPr lang="en-US" altLang="zh-TW" smtClean="0"/>
+              <a:rPr lang="en-US" altLang="zh-TW"/>
               <a:t>Fifth level</a:t>
             </a:r>
             <a:endParaRPr lang="zh-TW" altLang="en-US"/>
@@ -1491,7 +1506,7 @@
           </a:lstStyle>
           <a:p>
             <a:r>
-              <a:rPr lang="en-US" altLang="zh-TW" smtClean="0"/>
+              <a:rPr lang="en-US" altLang="zh-TW"/>
               <a:t>Click to edit Master title style</a:t>
             </a:r>
             <a:endParaRPr lang="zh-TW" altLang="en-US"/>
@@ -1611,7 +1626,7 @@
           <a:p>
             <a:pPr lvl="0"/>
             <a:r>
-              <a:rPr lang="en-US" altLang="zh-TW" smtClean="0"/>
+              <a:rPr lang="en-US" altLang="zh-TW"/>
               <a:t>Edit Master text styles</a:t>
             </a:r>
           </a:p>
@@ -1733,7 +1748,7 @@
           <a:lstStyle/>
           <a:p>
             <a:r>
-              <a:rPr lang="en-US" altLang="zh-TW" smtClean="0"/>
+              <a:rPr lang="en-US" altLang="zh-TW"/>
               <a:t>Click to edit Master title style</a:t>
             </a:r>
             <a:endParaRPr lang="zh-TW" altLang="en-US"/>
@@ -1790,35 +1805,35 @@
           <a:p>
             <a:pPr lvl="0"/>
             <a:r>
-              <a:rPr lang="en-US" altLang="zh-TW" smtClean="0"/>
+              <a:rPr lang="en-US" altLang="zh-TW"/>
               <a:t>Edit Master text styles</a:t>
             </a:r>
           </a:p>
           <a:p>
             <a:pPr lvl="1"/>
             <a:r>
-              <a:rPr lang="en-US" altLang="zh-TW" smtClean="0"/>
+              <a:rPr lang="en-US" altLang="zh-TW"/>
               <a:t>Second level</a:t>
             </a:r>
           </a:p>
           <a:p>
             <a:pPr lvl="2"/>
             <a:r>
-              <a:rPr lang="en-US" altLang="zh-TW" smtClean="0"/>
+              <a:rPr lang="en-US" altLang="zh-TW"/>
               <a:t>Third level</a:t>
             </a:r>
           </a:p>
           <a:p>
             <a:pPr lvl="3"/>
             <a:r>
-              <a:rPr lang="en-US" altLang="zh-TW" smtClean="0"/>
+              <a:rPr lang="en-US" altLang="zh-TW"/>
               <a:t>Fourth level</a:t>
             </a:r>
           </a:p>
           <a:p>
             <a:pPr lvl="4"/>
             <a:r>
-              <a:rPr lang="en-US" altLang="zh-TW" smtClean="0"/>
+              <a:rPr lang="en-US" altLang="zh-TW"/>
               <a:t>Fifth level</a:t>
             </a:r>
             <a:endParaRPr lang="zh-TW" altLang="en-US"/>
@@ -1875,35 +1890,35 @@
           <a:p>
             <a:pPr lvl="0"/>
             <a:r>
-              <a:rPr lang="en-US" altLang="zh-TW" smtClean="0"/>
+              <a:rPr lang="en-US" altLang="zh-TW"/>
               <a:t>Edit Master text styles</a:t>
             </a:r>
           </a:p>
           <a:p>
             <a:pPr lvl="1"/>
             <a:r>
-              <a:rPr lang="en-US" altLang="zh-TW" smtClean="0"/>
+              <a:rPr lang="en-US" altLang="zh-TW"/>
               <a:t>Second level</a:t>
             </a:r>
           </a:p>
           <a:p>
             <a:pPr lvl="2"/>
             <a:r>
-              <a:rPr lang="en-US" altLang="zh-TW" smtClean="0"/>
+              <a:rPr lang="en-US" altLang="zh-TW"/>
               <a:t>Third level</a:t>
             </a:r>
           </a:p>
           <a:p>
             <a:pPr lvl="3"/>
             <a:r>
-              <a:rPr lang="en-US" altLang="zh-TW" smtClean="0"/>
+              <a:rPr lang="en-US" altLang="zh-TW"/>
               <a:t>Fourth level</a:t>
             </a:r>
           </a:p>
           <a:p>
             <a:pPr lvl="4"/>
             <a:r>
-              <a:rPr lang="en-US" altLang="zh-TW" smtClean="0"/>
+              <a:rPr lang="en-US" altLang="zh-TW"/>
               <a:t>Fifth level</a:t>
             </a:r>
             <a:endParaRPr lang="zh-TW" altLang="en-US"/>
@@ -2030,7 +2045,7 @@
           </a:lstStyle>
           <a:p>
             <a:r>
-              <a:rPr lang="en-US" altLang="zh-TW" smtClean="0"/>
+              <a:rPr lang="en-US" altLang="zh-TW"/>
               <a:t>Click to edit Master title style</a:t>
             </a:r>
             <a:endParaRPr lang="zh-TW" altLang="en-US"/>
@@ -2096,7 +2111,7 @@
           <a:p>
             <a:pPr lvl="0"/>
             <a:r>
-              <a:rPr lang="en-US" altLang="zh-TW" smtClean="0"/>
+              <a:rPr lang="en-US" altLang="zh-TW"/>
               <a:t>Edit Master text styles</a:t>
             </a:r>
           </a:p>
@@ -2152,35 +2167,35 @@
           <a:p>
             <a:pPr lvl="0"/>
             <a:r>
-              <a:rPr lang="en-US" altLang="zh-TW" smtClean="0"/>
+              <a:rPr lang="en-US" altLang="zh-TW"/>
               <a:t>Edit Master text styles</a:t>
             </a:r>
           </a:p>
           <a:p>
             <a:pPr lvl="1"/>
             <a:r>
-              <a:rPr lang="en-US" altLang="zh-TW" smtClean="0"/>
+              <a:rPr lang="en-US" altLang="zh-TW"/>
               <a:t>Second level</a:t>
             </a:r>
           </a:p>
           <a:p>
             <a:pPr lvl="2"/>
             <a:r>
-              <a:rPr lang="en-US" altLang="zh-TW" smtClean="0"/>
+              <a:rPr lang="en-US" altLang="zh-TW"/>
               <a:t>Third level</a:t>
             </a:r>
           </a:p>
           <a:p>
             <a:pPr lvl="3"/>
             <a:r>
-              <a:rPr lang="en-US" altLang="zh-TW" smtClean="0"/>
+              <a:rPr lang="en-US" altLang="zh-TW"/>
               <a:t>Fourth level</a:t>
             </a:r>
           </a:p>
           <a:p>
             <a:pPr lvl="4"/>
             <a:r>
-              <a:rPr lang="en-US" altLang="zh-TW" smtClean="0"/>
+              <a:rPr lang="en-US" altLang="zh-TW"/>
               <a:t>Fifth level</a:t>
             </a:r>
             <a:endParaRPr lang="zh-TW" altLang="en-US"/>
@@ -2246,7 +2261,7 @@
           <a:p>
             <a:pPr lvl="0"/>
             <a:r>
-              <a:rPr lang="en-US" altLang="zh-TW" smtClean="0"/>
+              <a:rPr lang="en-US" altLang="zh-TW"/>
               <a:t>Edit Master text styles</a:t>
             </a:r>
           </a:p>
@@ -2302,35 +2317,35 @@
           <a:p>
             <a:pPr lvl="0"/>
             <a:r>
-              <a:rPr lang="en-US" altLang="zh-TW" smtClean="0"/>
+              <a:rPr lang="en-US" altLang="zh-TW"/>
               <a:t>Edit Master text styles</a:t>
             </a:r>
           </a:p>
           <a:p>
             <a:pPr lvl="1"/>
             <a:r>
-              <a:rPr lang="en-US" altLang="zh-TW" smtClean="0"/>
+              <a:rPr lang="en-US" altLang="zh-TW"/>
               <a:t>Second level</a:t>
             </a:r>
           </a:p>
           <a:p>
             <a:pPr lvl="2"/>
             <a:r>
-              <a:rPr lang="en-US" altLang="zh-TW" smtClean="0"/>
+              <a:rPr lang="en-US" altLang="zh-TW"/>
               <a:t>Third level</a:t>
             </a:r>
           </a:p>
           <a:p>
             <a:pPr lvl="3"/>
             <a:r>
-              <a:rPr lang="en-US" altLang="zh-TW" smtClean="0"/>
+              <a:rPr lang="en-US" altLang="zh-TW"/>
               <a:t>Fourth level</a:t>
             </a:r>
           </a:p>
           <a:p>
             <a:pPr lvl="4"/>
             <a:r>
-              <a:rPr lang="en-US" altLang="zh-TW" smtClean="0"/>
+              <a:rPr lang="en-US" altLang="zh-TW"/>
               <a:t>Fifth level</a:t>
             </a:r>
             <a:endParaRPr lang="zh-TW" altLang="en-US"/>
@@ -2453,7 +2468,7 @@
           <a:lstStyle/>
           <a:p>
             <a:r>
-              <a:rPr lang="en-US" altLang="zh-TW" smtClean="0"/>
+              <a:rPr lang="en-US" altLang="zh-TW"/>
               <a:t>Click to edit Master title style</a:t>
             </a:r>
             <a:endParaRPr lang="zh-TW" altLang="en-US"/>
@@ -2685,7 +2700,7 @@
           </a:lstStyle>
           <a:p>
             <a:r>
-              <a:rPr lang="en-US" altLang="zh-TW" smtClean="0"/>
+              <a:rPr lang="en-US" altLang="zh-TW"/>
               <a:t>Click to edit Master title style</a:t>
             </a:r>
             <a:endParaRPr lang="zh-TW" altLang="en-US"/>
@@ -2742,35 +2757,35 @@
           <a:p>
             <a:pPr lvl="0"/>
             <a:r>
-              <a:rPr lang="en-US" altLang="zh-TW" smtClean="0"/>
+              <a:rPr lang="en-US" altLang="zh-TW"/>
               <a:t>Edit Master text styles</a:t>
             </a:r>
           </a:p>
           <a:p>
             <a:pPr lvl="1"/>
             <a:r>
-              <a:rPr lang="en-US" altLang="zh-TW" smtClean="0"/>
+              <a:rPr lang="en-US" altLang="zh-TW"/>
               <a:t>Second level</a:t>
             </a:r>
           </a:p>
           <a:p>
             <a:pPr lvl="2"/>
             <a:r>
-              <a:rPr lang="en-US" altLang="zh-TW" smtClean="0"/>
+              <a:rPr lang="en-US" altLang="zh-TW"/>
               <a:t>Third level</a:t>
             </a:r>
           </a:p>
           <a:p>
             <a:pPr lvl="3"/>
             <a:r>
-              <a:rPr lang="en-US" altLang="zh-TW" smtClean="0"/>
+              <a:rPr lang="en-US" altLang="zh-TW"/>
               <a:t>Fourth level</a:t>
             </a:r>
           </a:p>
           <a:p>
             <a:pPr lvl="4"/>
             <a:r>
-              <a:rPr lang="en-US" altLang="zh-TW" smtClean="0"/>
+              <a:rPr lang="en-US" altLang="zh-TW"/>
               <a:t>Fifth level</a:t>
             </a:r>
             <a:endParaRPr lang="zh-TW" altLang="en-US"/>
@@ -2836,7 +2851,7 @@
           <a:p>
             <a:pPr lvl="0"/>
             <a:r>
-              <a:rPr lang="en-US" altLang="zh-TW" smtClean="0"/>
+              <a:rPr lang="en-US" altLang="zh-TW"/>
               <a:t>Edit Master text styles</a:t>
             </a:r>
           </a:p>
@@ -2967,7 +2982,7 @@
           </a:lstStyle>
           <a:p>
             <a:r>
-              <a:rPr lang="en-US" altLang="zh-TW" smtClean="0"/>
+              <a:rPr lang="en-US" altLang="zh-TW"/>
               <a:t>Click to edit Master title style</a:t>
             </a:r>
             <a:endParaRPr lang="zh-TW" altLang="en-US"/>
@@ -3032,7 +3047,7 @@
           </a:lstStyle>
           <a:p>
             <a:r>
-              <a:rPr lang="en-US" altLang="zh-TW" smtClean="0"/>
+              <a:rPr lang="en-US" altLang="zh-TW"/>
               <a:t>Click icon to add picture</a:t>
             </a:r>
             <a:endParaRPr lang="zh-TW" altLang="en-US"/>
@@ -3098,7 +3113,7 @@
           <a:p>
             <a:pPr lvl="0"/>
             <a:r>
-              <a:rPr lang="en-US" altLang="zh-TW" smtClean="0"/>
+              <a:rPr lang="en-US" altLang="zh-TW"/>
               <a:t>Edit Master text styles</a:t>
             </a:r>
           </a:p>
@@ -3240,10 +3255,9 @@
           <a:lstStyle/>
           <a:p>
             <a:r>
-              <a:rPr lang="zh-TW" altLang="en-US" smtClean="0"/>
+              <a:rPr lang="zh-TW" altLang="en-US"/>
               <a:t>按一下以編輯母片標題樣式</a:t>
             </a:r>
-            <a:endParaRPr lang="zh-TW" altLang="en-US"/>
           </a:p>
         </p:txBody>
       </p:sp>
@@ -3274,38 +3288,37 @@
           <a:p>
             <a:pPr lvl="0"/>
             <a:r>
-              <a:rPr lang="zh-TW" altLang="en-US" smtClean="0"/>
+              <a:rPr lang="zh-TW" altLang="en-US"/>
               <a:t>按一下以編輯母片文字樣式</a:t>
             </a:r>
           </a:p>
           <a:p>
             <a:pPr lvl="1"/>
             <a:r>
-              <a:rPr lang="zh-TW" altLang="en-US" smtClean="0"/>
+              <a:rPr lang="zh-TW" altLang="en-US"/>
               <a:t>第二層</a:t>
             </a:r>
           </a:p>
           <a:p>
             <a:pPr lvl="2"/>
             <a:r>
-              <a:rPr lang="zh-TW" altLang="en-US" smtClean="0"/>
+              <a:rPr lang="zh-TW" altLang="en-US"/>
               <a:t>第三層</a:t>
             </a:r>
           </a:p>
           <a:p>
             <a:pPr lvl="3"/>
             <a:r>
-              <a:rPr lang="zh-TW" altLang="en-US" smtClean="0"/>
+              <a:rPr lang="zh-TW" altLang="en-US"/>
               <a:t>第四層</a:t>
             </a:r>
           </a:p>
           <a:p>
             <a:pPr lvl="4"/>
             <a:r>
-              <a:rPr lang="zh-TW" altLang="en-US" smtClean="0"/>
+              <a:rPr lang="zh-TW" altLang="en-US"/>
               <a:t>第五層</a:t>
             </a:r>
-            <a:endParaRPr lang="zh-TW" altLang="en-US"/>
           </a:p>
         </p:txBody>
       </p:sp>
@@ -3726,7 +3739,7 @@
       </p:grpSpPr>
       <p:sp>
         <p:nvSpPr>
-          <p:cNvPr id="4" name="Title 3"/>
+          <p:cNvPr id="4" name="標題 3"/>
           <p:cNvSpPr>
             <a:spLocks noGrp="1"/>
           </p:cNvSpPr>
@@ -3734,186 +3747,106 @@
             <p:ph type="title"/>
           </p:nvPr>
         </p:nvSpPr>
-        <p:spPr/>
-        <p:txBody>
-          <a:bodyPr>
-            <a:normAutofit/>
-          </a:bodyPr>
-          <a:lstStyle/>
-          <a:p>
-            <a:r>
-              <a:rPr lang="en-US" altLang="zh-CN" sz="4800" b="1" dirty="0">
-                <a:solidFill>
-                  <a:srgbClr val="660033"/>
-                </a:solidFill>
-                <a:latin typeface="Microsoft JhengHei" panose="020B0604030504040204" pitchFamily="34" charset="-120"/>
-                <a:ea typeface="Microsoft JhengHei" panose="020B0604030504040204" pitchFamily="34" charset="-120"/>
-              </a:rPr>
-              <a:t>【</a:t>
-            </a:r>
-            <a:r>
-              <a:rPr lang="zh-CN" altLang="en-US" sz="4800" b="1" dirty="0">
-                <a:solidFill>
-                  <a:srgbClr val="660033"/>
-                </a:solidFill>
-                <a:latin typeface="Microsoft JhengHei" panose="020B0604030504040204" pitchFamily="34" charset="-120"/>
-                <a:ea typeface="Microsoft JhengHei" panose="020B0604030504040204" pitchFamily="34" charset="-120"/>
-              </a:rPr>
-              <a:t>救主的愛</a:t>
-            </a:r>
-            <a:r>
-              <a:rPr lang="en-US" altLang="zh-CN" sz="4800" b="1" dirty="0">
-                <a:solidFill>
-                  <a:srgbClr val="660033"/>
-                </a:solidFill>
-                <a:latin typeface="Microsoft JhengHei" panose="020B0604030504040204" pitchFamily="34" charset="-120"/>
-                <a:ea typeface="Microsoft JhengHei" panose="020B0604030504040204" pitchFamily="34" charset="-120"/>
-              </a:rPr>
-              <a:t>】</a:t>
-            </a:r>
-          </a:p>
-        </p:txBody>
-      </p:sp>
-      <p:sp>
-        <p:nvSpPr>
-          <p:cNvPr id="5" name="Content Placeholder 4"/>
-          <p:cNvSpPr>
-            <a:spLocks noGrp="1"/>
-          </p:cNvSpPr>
-          <p:nvPr>
-            <p:ph idx="1"/>
-          </p:nvPr>
-        </p:nvSpPr>
-        <p:spPr/>
+        <p:spPr>
+          <a:xfrm>
+            <a:off x="0" y="2660915"/>
+            <a:ext cx="12192000" cy="1143000"/>
+          </a:xfrm>
+        </p:spPr>
         <p:txBody>
           <a:bodyPr>
             <a:noAutofit/>
           </a:bodyPr>
           <a:lstStyle/>
           <a:p>
-            <a:pPr marL="0" indent="0" algn="ctr">
-              <a:buNone/>
-            </a:pPr>
-            <a:r>
-              <a:rPr lang="zh-TW" altLang="en-US" sz="5400" b="1" dirty="0">
+            <a:r>
+              <a:rPr lang="zh-CN" altLang="en-US" sz="5333" b="1" u="sng" dirty="0">
+                <a:solidFill>
+                  <a:srgbClr val="000066"/>
+                </a:solidFill>
+                <a:effectLst>
+                  <a:outerShdw blurRad="38100" dist="38100" dir="2700000" algn="tl">
+                    <a:srgbClr val="000000">
+                      <a:alpha val="43137"/>
+                    </a:srgbClr>
+                  </a:outerShdw>
+                </a:effectLst>
+                <a:latin typeface="微軟正黑體" pitchFamily="34" charset="-120"/>
+                <a:ea typeface="微軟正黑體" pitchFamily="34" charset="-120"/>
+              </a:rPr>
+              <a:t>宣道詩 </a:t>
+            </a:r>
+            <a:r>
+              <a:rPr lang="en-US" altLang="zh-CN" sz="5333" b="1" u="sng" dirty="0">
+                <a:solidFill>
+                  <a:srgbClr val="000066"/>
+                </a:solidFill>
+                <a:effectLst>
+                  <a:outerShdw blurRad="38100" dist="38100" dir="2700000" algn="tl">
+                    <a:srgbClr val="000000">
+                      <a:alpha val="43137"/>
+                    </a:srgbClr>
+                  </a:outerShdw>
+                </a:effectLst>
+                <a:latin typeface="微軟正黑體" pitchFamily="34" charset="-120"/>
+                <a:ea typeface="微軟正黑體" pitchFamily="34" charset="-120"/>
+              </a:rPr>
+              <a:t>202</a:t>
+            </a:r>
+            <a:br>
+              <a:rPr lang="en-US" altLang="zh-CN" sz="7200" b="1" i="1" dirty="0">
                 <a:solidFill>
                   <a:srgbClr val="660033"/>
                 </a:solidFill>
-                <a:latin typeface="Microsoft JhengHei" panose="020B0604030504040204" pitchFamily="34" charset="-120"/>
-                <a:ea typeface="Microsoft JhengHei" panose="020B0604030504040204" pitchFamily="34" charset="-120"/>
+                <a:effectLst>
+                  <a:outerShdw blurRad="38100" dist="38100" dir="2700000" algn="tl">
+                    <a:srgbClr val="000000">
+                      <a:alpha val="43137"/>
+                    </a:srgbClr>
+                  </a:outerShdw>
+                </a:effectLst>
+                <a:latin typeface="微軟正黑體" pitchFamily="34" charset="-120"/>
+                <a:ea typeface="微軟正黑體" pitchFamily="34" charset="-120"/>
               </a:rPr>
-              <a:t>拿撒勒人耶穌面前</a:t>
-            </a:r>
-          </a:p>
-          <a:p>
-            <a:pPr marL="0" indent="0" algn="ctr">
-              <a:buNone/>
-            </a:pPr>
-            <a:r>
-              <a:rPr lang="zh-TW" altLang="en-US" sz="5400" b="1" dirty="0">
+            </a:br>
+            <a:r>
+              <a:rPr lang="zh-CN" altLang="en-US" sz="8000" b="1" dirty="0">
                 <a:solidFill>
                   <a:srgbClr val="660033"/>
                 </a:solidFill>
-                <a:latin typeface="Microsoft JhengHei" panose="020B0604030504040204" pitchFamily="34" charset="-120"/>
-                <a:ea typeface="Microsoft JhengHei" panose="020B0604030504040204" pitchFamily="34" charset="-120"/>
+                <a:effectLst>
+                  <a:outerShdw blurRad="38100" dist="38100" dir="2700000" algn="tl">
+                    <a:srgbClr val="000000">
+                      <a:alpha val="43137"/>
+                    </a:srgbClr>
+                  </a:outerShdw>
+                </a:effectLst>
+                <a:latin typeface="微軟正黑體" pitchFamily="34" charset="-120"/>
+                <a:ea typeface="微軟正黑體" pitchFamily="34" charset="-120"/>
               </a:rPr>
-              <a:t>我站立心便愕然</a:t>
-            </a:r>
-          </a:p>
-          <a:p>
-            <a:pPr marL="0" indent="0" algn="ctr">
-              <a:buNone/>
-            </a:pPr>
-            <a:r>
-              <a:rPr lang="zh-TW" altLang="en-US" sz="5400" b="1" dirty="0">
-                <a:solidFill>
-                  <a:srgbClr val="660033"/>
-                </a:solidFill>
-                <a:latin typeface="Microsoft JhengHei" panose="020B0604030504040204" pitchFamily="34" charset="-120"/>
-                <a:ea typeface="Microsoft JhengHei" panose="020B0604030504040204" pitchFamily="34" charset="-120"/>
-              </a:rPr>
-              <a:t>希奇他也把我愛憐</a:t>
-            </a:r>
-          </a:p>
-          <a:p>
-            <a:pPr marL="0" indent="0" algn="ctr">
-              <a:buNone/>
-            </a:pPr>
-            <a:r>
-              <a:rPr lang="zh-TW" altLang="en-US" sz="5400" b="1" dirty="0">
-                <a:solidFill>
-                  <a:srgbClr val="660033"/>
-                </a:solidFill>
-                <a:latin typeface="Microsoft JhengHei" panose="020B0604030504040204" pitchFamily="34" charset="-120"/>
-                <a:ea typeface="Microsoft JhengHei" panose="020B0604030504040204" pitchFamily="34" charset="-120"/>
-              </a:rPr>
-              <a:t>一切罪</a:t>
-            </a:r>
-            <a:r>
-              <a:rPr lang="zh-CN" altLang="zh-TW" sz="5400" b="1" dirty="0">
-                <a:solidFill>
-                  <a:srgbClr val="660033"/>
-                </a:solidFill>
-                <a:latin typeface="Microsoft JhengHei" panose="020B0604030504040204" pitchFamily="34" charset="-120"/>
-                <a:ea typeface="Microsoft JhengHei" panose="020B0604030504040204" pitchFamily="34" charset="-120"/>
-              </a:rPr>
-              <a:t>污</a:t>
-            </a:r>
-            <a:r>
-              <a:rPr lang="zh-TW" altLang="en-US" sz="5400" b="1" dirty="0">
-                <a:solidFill>
-                  <a:srgbClr val="660033"/>
-                </a:solidFill>
-                <a:latin typeface="Microsoft JhengHei" panose="020B0604030504040204" pitchFamily="34" charset="-120"/>
-                <a:ea typeface="Microsoft JhengHei" panose="020B0604030504040204" pitchFamily="34" charset="-120"/>
-              </a:rPr>
-              <a:t>蒙赦免</a:t>
-            </a:r>
-          </a:p>
-        </p:txBody>
-      </p:sp>
-      <p:sp>
-        <p:nvSpPr>
-          <p:cNvPr id="6" name="Text Box 1"/>
-          <p:cNvSpPr txBox="1"/>
-          <p:nvPr/>
-        </p:nvSpPr>
-        <p:spPr>
-          <a:xfrm>
-            <a:off x="1199456" y="1700808"/>
-            <a:ext cx="1161268" cy="923330"/>
-          </a:xfrm>
-          <a:prstGeom prst="rect">
-            <a:avLst/>
-          </a:prstGeom>
-          <a:noFill/>
-          <a:ln w="9525">
-            <a:noFill/>
-            <a:miter lim="800000"/>
-          </a:ln>
-        </p:spPr>
-        <p:txBody>
-          <a:bodyPr wrap="square">
-            <a:spAutoFit/>
-          </a:bodyPr>
-          <a:lstStyle/>
-          <a:p>
-            <a:pPr algn="ctr"/>
-            <a:r>
-              <a:rPr lang="en-US" sz="5400" b="1" dirty="0">
-                <a:solidFill>
-                  <a:srgbClr val="660033"/>
-                </a:solidFill>
-              </a:rPr>
-              <a:t>1.</a:t>
-            </a:r>
+              <a:t>救主的愛</a:t>
+            </a:r>
+            <a:endParaRPr lang="zh-TW" altLang="en-US" sz="8000" b="1" dirty="0">
+              <a:solidFill>
+                <a:srgbClr val="660033"/>
+              </a:solidFill>
+              <a:effectLst>
+                <a:outerShdw blurRad="38100" dist="38100" dir="2700000" algn="tl">
+                  <a:srgbClr val="000000">
+                    <a:alpha val="43137"/>
+                  </a:srgbClr>
+                </a:outerShdw>
+              </a:effectLst>
+              <a:latin typeface="微軟正黑體" pitchFamily="34" charset="-120"/>
+              <a:ea typeface="微軟正黑體" pitchFamily="34" charset="-120"/>
+            </a:endParaRPr>
           </a:p>
         </p:txBody>
       </p:sp>
     </p:spTree>
     <p:extLst>
       <p:ext uri="{BB962C8B-B14F-4D97-AF65-F5344CB8AC3E}">
-        <p14:creationId xmlns:p14="http://schemas.microsoft.com/office/powerpoint/2010/main" val="3736612309"/>
+        <p14:creationId xmlns:p14="http://schemas.microsoft.com/office/powerpoint/2010/main" val="3724263107"/>
       </p:ext>
     </p:extLst>
   </p:cSld>
@@ -3942,57 +3875,149 @@
       </p:grpSpPr>
       <p:sp>
         <p:nvSpPr>
-          <p:cNvPr id="4" name="Title 3"/>
-          <p:cNvSpPr>
-            <a:spLocks noGrp="1"/>
-          </p:cNvSpPr>
-          <p:nvPr>
-            <p:ph type="title"/>
-          </p:nvPr>
-        </p:nvSpPr>
-        <p:spPr/>
-        <p:txBody>
-          <a:bodyPr>
+          <p:cNvPr id="5" name="內容版面配置區 4"/>
+          <p:cNvSpPr>
+            <a:spLocks noGrp="1"/>
+          </p:cNvSpPr>
+          <p:nvPr>
+            <p:ph idx="1"/>
+          </p:nvPr>
+        </p:nvSpPr>
+        <p:spPr>
+          <a:xfrm>
+            <a:off x="0" y="2084851"/>
+            <a:ext cx="12192000" cy="2404863"/>
+          </a:xfrm>
+        </p:spPr>
+        <p:txBody>
+          <a:bodyPr anchor="ctr">
             <a:normAutofit/>
           </a:bodyPr>
           <a:lstStyle/>
           <a:p>
-            <a:r>
-              <a:rPr lang="en-US" altLang="zh-CN" sz="4800" b="1" dirty="0">
+            <a:pPr marL="0" indent="0" algn="ctr">
+              <a:buNone/>
+            </a:pPr>
+            <a:r>
+              <a:rPr lang="zh-TW" altLang="en-US" sz="6400" b="1" dirty="0">
                 <a:solidFill>
                   <a:srgbClr val="660033"/>
                 </a:solidFill>
                 <a:latin typeface="Microsoft JhengHei" panose="020B0604030504040204" pitchFamily="34" charset="-120"/>
                 <a:ea typeface="Microsoft JhengHei" panose="020B0604030504040204" pitchFamily="34" charset="-120"/>
               </a:rPr>
-              <a:t>【</a:t>
-            </a:r>
-            <a:r>
-              <a:rPr lang="zh-CN" altLang="en-US" sz="4800" b="1" dirty="0">
+              <a:t>主荷</a:t>
+            </a:r>
+            <a:r>
+              <a:rPr lang="zh-CN" altLang="zh-TW" sz="6400" b="1" dirty="0">
                 <a:solidFill>
                   <a:srgbClr val="660033"/>
                 </a:solidFill>
                 <a:latin typeface="Microsoft JhengHei" panose="020B0604030504040204" pitchFamily="34" charset="-120"/>
                 <a:ea typeface="Microsoft JhengHei" panose="020B0604030504040204" pitchFamily="34" charset="-120"/>
               </a:rPr>
-              <a:t>救主的愛</a:t>
-            </a:r>
-            <a:r>
-              <a:rPr lang="en-US" altLang="zh-CN" sz="4800" b="1" dirty="0">
+              <a:t>重擔</a:t>
+            </a:r>
+            <a:r>
+              <a:rPr lang="zh-TW" altLang="en-US" sz="6400" b="1" dirty="0">
                 <a:solidFill>
                   <a:srgbClr val="660033"/>
                 </a:solidFill>
                 <a:latin typeface="Microsoft JhengHei" panose="020B0604030504040204" pitchFamily="34" charset="-120"/>
                 <a:ea typeface="Microsoft JhengHei" panose="020B0604030504040204" pitchFamily="34" charset="-120"/>
               </a:rPr>
-              <a:t>】</a:t>
-            </a:r>
-          </a:p>
-        </p:txBody>
-      </p:sp>
-      <p:sp>
-        <p:nvSpPr>
-          <p:cNvPr id="5" name="Content Placeholder 4"/>
+              <a:t>在那夜靜</a:t>
+            </a:r>
+          </a:p>
+          <a:p>
+            <a:pPr marL="0" indent="0" algn="ctr">
+              <a:buNone/>
+            </a:pPr>
+            <a:r>
+              <a:rPr lang="zh-TW" altLang="en-US" sz="6400" b="1" dirty="0">
+                <a:solidFill>
+                  <a:srgbClr val="660033"/>
+                </a:solidFill>
+                <a:latin typeface="Microsoft JhengHei" panose="020B0604030504040204" pitchFamily="34" charset="-120"/>
+                <a:ea typeface="Microsoft JhengHei" panose="020B0604030504040204" pitchFamily="34" charset="-120"/>
+              </a:rPr>
+              <a:t>天使看見發慈心</a:t>
+            </a:r>
+          </a:p>
+        </p:txBody>
+      </p:sp>
+      <p:sp>
+        <p:nvSpPr>
+          <p:cNvPr id="3" name="TextBox 2"/>
+          <p:cNvSpPr txBox="1"/>
+          <p:nvPr/>
+        </p:nvSpPr>
+        <p:spPr>
+          <a:xfrm>
+            <a:off x="0" y="5061181"/>
+            <a:ext cx="12192000" cy="666786"/>
+          </a:xfrm>
+          <a:prstGeom prst="rect">
+            <a:avLst/>
+          </a:prstGeom>
+          <a:noFill/>
+        </p:spPr>
+        <p:txBody>
+          <a:bodyPr wrap="square" rtlCol="0">
+            <a:spAutoFit/>
+          </a:bodyPr>
+          <a:lstStyle/>
+          <a:p>
+            <a:pPr algn="ctr"/>
+            <a:r>
+              <a:rPr lang="en-US" sz="3733" b="1" dirty="0">
+                <a:solidFill>
+                  <a:srgbClr val="660033"/>
+                </a:solidFill>
+              </a:rPr>
+              <a:t>( 3 / 5 )</a:t>
+            </a:r>
+            <a:endParaRPr lang="vi-VN" sz="3733" b="1" dirty="0">
+              <a:solidFill>
+                <a:srgbClr val="660033"/>
+              </a:solidFill>
+            </a:endParaRPr>
+          </a:p>
+        </p:txBody>
+      </p:sp>
+    </p:spTree>
+    <p:extLst>
+      <p:ext uri="{BB962C8B-B14F-4D97-AF65-F5344CB8AC3E}">
+        <p14:creationId xmlns:p14="http://schemas.microsoft.com/office/powerpoint/2010/main" val="2247285543"/>
+      </p:ext>
+    </p:extLst>
+  </p:cSld>
+  <p:clrMapOvr>
+    <a:masterClrMapping/>
+  </p:clrMapOvr>
+</p:sld>
+</file>
+
+<file path=ppt/slides/slide11.xml><?xml version="1.0" encoding="utf-8"?>
+<p:sld xmlns:a="http://schemas.openxmlformats.org/drawingml/2006/main" xmlns:r="http://schemas.openxmlformats.org/officeDocument/2006/relationships" xmlns:p="http://schemas.openxmlformats.org/presentationml/2006/main">
+  <p:cSld>
+    <p:spTree>
+      <p:nvGrpSpPr>
+        <p:cNvPr id="1" name=""/>
+        <p:cNvGrpSpPr/>
+        <p:nvPr/>
+      </p:nvGrpSpPr>
+      <p:grpSpPr>
+        <a:xfrm>
+          <a:off x="0" y="0"/>
+          <a:ext cx="0" cy="0"/>
+          <a:chOff x="0" y="0"/>
+          <a:chExt cx="0" cy="0"/>
+        </a:xfrm>
+      </p:grpSpPr>
+      <p:sp>
+        <p:nvSpPr>
+          <p:cNvPr id="5" name="內容版面配置區 4"/>
           <p:cNvSpPr>
             <a:spLocks noGrp="1"/>
           </p:cNvSpPr>
@@ -4000,10 +4025,15 @@
             <p:ph idx="1"/>
           </p:nvPr>
         </p:nvSpPr>
-        <p:spPr/>
-        <p:txBody>
-          <a:bodyPr>
-            <a:noAutofit/>
+        <p:spPr>
+          <a:xfrm>
+            <a:off x="0" y="2084851"/>
+            <a:ext cx="12192000" cy="2404863"/>
+          </a:xfrm>
+        </p:spPr>
+        <p:txBody>
+          <a:bodyPr anchor="ctr">
+            <a:normAutofit/>
           </a:bodyPr>
           <a:lstStyle/>
           <a:p>
@@ -4011,7 +4041,129 @@
               <a:buNone/>
             </a:pPr>
             <a:r>
-              <a:rPr lang="zh-TW" altLang="en-US" sz="5400" b="1" dirty="0">
+              <a:rPr lang="zh-TW" altLang="en-US" sz="6400" b="1" dirty="0">
+                <a:solidFill>
+                  <a:srgbClr val="660033"/>
+                </a:solidFill>
+                <a:latin typeface="Microsoft JhengHei" panose="020B0604030504040204" pitchFamily="34" charset="-120"/>
+                <a:ea typeface="Microsoft JhengHei" panose="020B0604030504040204" pitchFamily="34" charset="-120"/>
+              </a:rPr>
+              <a:t>從光明處毅然降臨</a:t>
+            </a:r>
+          </a:p>
+          <a:p>
+            <a:pPr marL="0" indent="0" algn="ctr">
+              <a:buNone/>
+            </a:pPr>
+            <a:r>
+              <a:rPr lang="zh-TW" altLang="en-US" sz="6400" b="1" dirty="0">
+                <a:solidFill>
+                  <a:srgbClr val="660033"/>
+                </a:solidFill>
+                <a:latin typeface="Microsoft JhengHei" panose="020B0604030504040204" pitchFamily="34" charset="-120"/>
+                <a:ea typeface="Microsoft JhengHei" panose="020B0604030504040204" pitchFamily="34" charset="-120"/>
+              </a:rPr>
+              <a:t>安慰主傷痛苦情</a:t>
+            </a:r>
+          </a:p>
+        </p:txBody>
+      </p:sp>
+      <p:sp>
+        <p:nvSpPr>
+          <p:cNvPr id="3" name="TextBox 2"/>
+          <p:cNvSpPr txBox="1"/>
+          <p:nvPr/>
+        </p:nvSpPr>
+        <p:spPr>
+          <a:xfrm>
+            <a:off x="0" y="5061181"/>
+            <a:ext cx="12192000" cy="666786"/>
+          </a:xfrm>
+          <a:prstGeom prst="rect">
+            <a:avLst/>
+          </a:prstGeom>
+          <a:noFill/>
+        </p:spPr>
+        <p:txBody>
+          <a:bodyPr wrap="square" rtlCol="0">
+            <a:spAutoFit/>
+          </a:bodyPr>
+          <a:lstStyle/>
+          <a:p>
+            <a:pPr algn="ctr"/>
+            <a:r>
+              <a:rPr lang="en-US" sz="3733" b="1" dirty="0">
+                <a:solidFill>
+                  <a:srgbClr val="660033"/>
+                </a:solidFill>
+              </a:rPr>
+              <a:t>( 3 / 5 )</a:t>
+            </a:r>
+            <a:endParaRPr lang="vi-VN" sz="3733" b="1" dirty="0">
+              <a:solidFill>
+                <a:srgbClr val="660033"/>
+              </a:solidFill>
+            </a:endParaRPr>
+          </a:p>
+        </p:txBody>
+      </p:sp>
+    </p:spTree>
+    <p:extLst>
+      <p:ext uri="{BB962C8B-B14F-4D97-AF65-F5344CB8AC3E}">
+        <p14:creationId xmlns:p14="http://schemas.microsoft.com/office/powerpoint/2010/main" val="1693912119"/>
+      </p:ext>
+    </p:extLst>
+  </p:cSld>
+  <p:clrMapOvr>
+    <a:masterClrMapping/>
+  </p:clrMapOvr>
+</p:sld>
+</file>
+
+<file path=ppt/slides/slide12.xml><?xml version="1.0" encoding="utf-8"?>
+<p:sld xmlns:a="http://schemas.openxmlformats.org/drawingml/2006/main" xmlns:r="http://schemas.openxmlformats.org/officeDocument/2006/relationships" xmlns:p="http://schemas.openxmlformats.org/presentationml/2006/main">
+  <p:cSld>
+    <p:spTree>
+      <p:nvGrpSpPr>
+        <p:cNvPr id="1" name=""/>
+        <p:cNvGrpSpPr/>
+        <p:nvPr/>
+      </p:nvGrpSpPr>
+      <p:grpSpPr>
+        <a:xfrm>
+          <a:off x="0" y="0"/>
+          <a:ext cx="0" cy="0"/>
+          <a:chOff x="0" y="0"/>
+          <a:chExt cx="0" cy="0"/>
+        </a:xfrm>
+      </p:grpSpPr>
+      <p:sp>
+        <p:nvSpPr>
+          <p:cNvPr id="5" name="內容版面配置區 4"/>
+          <p:cNvSpPr>
+            <a:spLocks noGrp="1"/>
+          </p:cNvSpPr>
+          <p:nvPr>
+            <p:ph idx="1"/>
+          </p:nvPr>
+        </p:nvSpPr>
+        <p:spPr>
+          <a:xfrm>
+            <a:off x="0" y="2084851"/>
+            <a:ext cx="12192000" cy="2404863"/>
+          </a:xfrm>
+        </p:spPr>
+        <p:txBody>
+          <a:bodyPr anchor="ctr">
+            <a:normAutofit/>
+          </a:bodyPr>
+          <a:lstStyle/>
+          <a:p>
+            <a:pPr marL="0" indent="0" algn="ctr">
+              <a:buNone/>
+            </a:pPr>
+            <a:r>
+              <a:rPr lang="zh-TW" altLang="en-US" sz="6400" b="1" dirty="0">
                 <a:solidFill>
                   <a:srgbClr val="660033"/>
                 </a:solidFill>
@@ -4026,7 +4178,7 @@
               <a:buNone/>
             </a:pPr>
             <a:r>
-              <a:rPr lang="zh-TW" altLang="en-US" sz="5400" b="1" dirty="0">
+              <a:rPr lang="zh-TW" altLang="en-US" sz="6400" b="1" dirty="0">
                 <a:solidFill>
                   <a:srgbClr val="660033"/>
                 </a:solidFill>
@@ -4036,7 +4188,7 @@
               <a:t>主如此</a:t>
             </a:r>
             <a:r>
-              <a:rPr lang="zh-CN" altLang="zh-TW" sz="5400" b="1" dirty="0">
+              <a:rPr lang="zh-CN" altLang="zh-TW" sz="6400" b="1" dirty="0">
                 <a:solidFill>
                   <a:srgbClr val="660033"/>
                 </a:solidFill>
@@ -4046,7 +4198,7 @@
               <a:t>愛</a:t>
             </a:r>
             <a:r>
-              <a:rPr lang="zh-TW" altLang="en-US" sz="5400" b="1" dirty="0">
+              <a:rPr lang="zh-TW" altLang="en-US" sz="6400" b="1" dirty="0">
                 <a:solidFill>
                   <a:srgbClr val="660033"/>
                 </a:solidFill>
@@ -4056,12 +4208,65 @@
               <a:t>我罪人</a:t>
             </a:r>
           </a:p>
+        </p:txBody>
+      </p:sp>
+    </p:spTree>
+    <p:extLst>
+      <p:ext uri="{BB962C8B-B14F-4D97-AF65-F5344CB8AC3E}">
+        <p14:creationId xmlns:p14="http://schemas.microsoft.com/office/powerpoint/2010/main" val="2777514878"/>
+      </p:ext>
+    </p:extLst>
+  </p:cSld>
+  <p:clrMapOvr>
+    <a:masterClrMapping/>
+  </p:clrMapOvr>
+</p:sld>
+</file>
+
+<file path=ppt/slides/slide13.xml><?xml version="1.0" encoding="utf-8"?>
+<p:sld xmlns:a="http://schemas.openxmlformats.org/drawingml/2006/main" xmlns:r="http://schemas.openxmlformats.org/officeDocument/2006/relationships" xmlns:p="http://schemas.openxmlformats.org/presentationml/2006/main">
+  <p:cSld>
+    <p:spTree>
+      <p:nvGrpSpPr>
+        <p:cNvPr id="1" name=""/>
+        <p:cNvGrpSpPr/>
+        <p:nvPr/>
+      </p:nvGrpSpPr>
+      <p:grpSpPr>
+        <a:xfrm>
+          <a:off x="0" y="0"/>
+          <a:ext cx="0" cy="0"/>
+          <a:chOff x="0" y="0"/>
+          <a:chExt cx="0" cy="0"/>
+        </a:xfrm>
+      </p:grpSpPr>
+      <p:sp>
+        <p:nvSpPr>
+          <p:cNvPr id="5" name="內容版面配置區 4"/>
+          <p:cNvSpPr>
+            <a:spLocks noGrp="1"/>
+          </p:cNvSpPr>
+          <p:nvPr>
+            <p:ph idx="1"/>
+          </p:nvPr>
+        </p:nvSpPr>
+        <p:spPr>
+          <a:xfrm>
+            <a:off x="0" y="2084851"/>
+            <a:ext cx="12192000" cy="2404863"/>
+          </a:xfrm>
+        </p:spPr>
+        <p:txBody>
+          <a:bodyPr anchor="ctr">
+            <a:normAutofit/>
+          </a:bodyPr>
+          <a:lstStyle/>
           <a:p>
             <a:pPr marL="0" indent="0" algn="ctr">
               <a:buNone/>
             </a:pPr>
             <a:r>
-              <a:rPr lang="zh-TW" altLang="en-US" sz="5400" b="1" dirty="0">
+              <a:rPr lang="zh-TW" altLang="en-US" sz="6400" b="1" dirty="0">
                 <a:solidFill>
                   <a:srgbClr val="660033"/>
                 </a:solidFill>
@@ -4076,7 +4281,7 @@
               <a:buNone/>
             </a:pPr>
             <a:r>
-              <a:rPr lang="zh-TW" altLang="en-US" sz="5400" b="1" dirty="0">
+              <a:rPr lang="zh-TW" altLang="en-US" sz="6400" b="1" dirty="0">
                 <a:solidFill>
                   <a:srgbClr val="660033"/>
                 </a:solidFill>
@@ -4091,7 +4296,691 @@
     </p:spTree>
     <p:extLst>
       <p:ext uri="{BB962C8B-B14F-4D97-AF65-F5344CB8AC3E}">
-        <p14:creationId xmlns:p14="http://schemas.microsoft.com/office/powerpoint/2010/main" val="2888403271"/>
+        <p14:creationId xmlns:p14="http://schemas.microsoft.com/office/powerpoint/2010/main" val="3362149329"/>
+      </p:ext>
+    </p:extLst>
+  </p:cSld>
+  <p:clrMapOvr>
+    <a:masterClrMapping/>
+  </p:clrMapOvr>
+</p:sld>
+</file>
+
+<file path=ppt/slides/slide14.xml><?xml version="1.0" encoding="utf-8"?>
+<p:sld xmlns:a="http://schemas.openxmlformats.org/drawingml/2006/main" xmlns:r="http://schemas.openxmlformats.org/officeDocument/2006/relationships" xmlns:p="http://schemas.openxmlformats.org/presentationml/2006/main">
+  <p:cSld>
+    <p:spTree>
+      <p:nvGrpSpPr>
+        <p:cNvPr id="1" name=""/>
+        <p:cNvGrpSpPr/>
+        <p:nvPr/>
+      </p:nvGrpSpPr>
+      <p:grpSpPr>
+        <a:xfrm>
+          <a:off x="0" y="0"/>
+          <a:ext cx="0" cy="0"/>
+          <a:chOff x="0" y="0"/>
+          <a:chExt cx="0" cy="0"/>
+        </a:xfrm>
+      </p:grpSpPr>
+      <p:sp>
+        <p:nvSpPr>
+          <p:cNvPr id="5" name="內容版面配置區 4"/>
+          <p:cNvSpPr>
+            <a:spLocks noGrp="1"/>
+          </p:cNvSpPr>
+          <p:nvPr>
+            <p:ph idx="1"/>
+          </p:nvPr>
+        </p:nvSpPr>
+        <p:spPr>
+          <a:xfrm>
+            <a:off x="0" y="2084851"/>
+            <a:ext cx="12192000" cy="2404863"/>
+          </a:xfrm>
+        </p:spPr>
+        <p:txBody>
+          <a:bodyPr anchor="ctr">
+            <a:normAutofit/>
+          </a:bodyPr>
+          <a:lstStyle/>
+          <a:p>
+            <a:pPr marL="0" indent="0" algn="ctr">
+              <a:buNone/>
+            </a:pPr>
+            <a:r>
+              <a:rPr lang="zh-CN" altLang="zh-TW" sz="6400" b="1" dirty="0">
+                <a:solidFill>
+                  <a:srgbClr val="660033"/>
+                </a:solidFill>
+                <a:latin typeface="Microsoft JhengHei" panose="020B0604030504040204" pitchFamily="34" charset="-120"/>
+                <a:ea typeface="Microsoft JhengHei" panose="020B0604030504040204" pitchFamily="34" charset="-120"/>
+              </a:rPr>
+              <a:t>擔</a:t>
+            </a:r>
+            <a:r>
+              <a:rPr lang="zh-TW" altLang="en-US" sz="6400" b="1" dirty="0">
+                <a:solidFill>
+                  <a:srgbClr val="660033"/>
+                </a:solidFill>
+                <a:latin typeface="Microsoft JhengHei" panose="020B0604030504040204" pitchFamily="34" charset="-120"/>
+                <a:ea typeface="Microsoft JhengHei" panose="020B0604030504040204" pitchFamily="34" charset="-120"/>
+              </a:rPr>
+              <a:t>當我罪並我苦愁</a:t>
+            </a:r>
+          </a:p>
+          <a:p>
+            <a:pPr marL="0" indent="0" algn="ctr">
+              <a:buNone/>
+            </a:pPr>
+            <a:r>
+              <a:rPr lang="zh-TW" altLang="en-US" sz="6400" b="1" dirty="0">
+                <a:solidFill>
+                  <a:srgbClr val="660033"/>
+                </a:solidFill>
+                <a:latin typeface="Microsoft JhengHei" panose="020B0604030504040204" pitchFamily="34" charset="-120"/>
+                <a:ea typeface="Microsoft JhengHei" panose="020B0604030504040204" pitchFamily="34" charset="-120"/>
+              </a:rPr>
+              <a:t>自己肩負不怨尤</a:t>
+            </a:r>
+          </a:p>
+        </p:txBody>
+      </p:sp>
+      <p:sp>
+        <p:nvSpPr>
+          <p:cNvPr id="3" name="TextBox 2"/>
+          <p:cNvSpPr txBox="1"/>
+          <p:nvPr/>
+        </p:nvSpPr>
+        <p:spPr>
+          <a:xfrm>
+            <a:off x="0" y="5061181"/>
+            <a:ext cx="12192000" cy="666786"/>
+          </a:xfrm>
+          <a:prstGeom prst="rect">
+            <a:avLst/>
+          </a:prstGeom>
+          <a:noFill/>
+        </p:spPr>
+        <p:txBody>
+          <a:bodyPr wrap="square" rtlCol="0">
+            <a:spAutoFit/>
+          </a:bodyPr>
+          <a:lstStyle/>
+          <a:p>
+            <a:pPr algn="ctr"/>
+            <a:r>
+              <a:rPr lang="en-US" sz="3733" b="1" dirty="0">
+                <a:solidFill>
+                  <a:srgbClr val="660033"/>
+                </a:solidFill>
+              </a:rPr>
+              <a:t>( 4 / 5 )</a:t>
+            </a:r>
+            <a:endParaRPr lang="vi-VN" sz="3733" b="1" dirty="0">
+              <a:solidFill>
+                <a:srgbClr val="660033"/>
+              </a:solidFill>
+            </a:endParaRPr>
+          </a:p>
+        </p:txBody>
+      </p:sp>
+    </p:spTree>
+    <p:extLst>
+      <p:ext uri="{BB962C8B-B14F-4D97-AF65-F5344CB8AC3E}">
+        <p14:creationId xmlns:p14="http://schemas.microsoft.com/office/powerpoint/2010/main" val="2984483411"/>
+      </p:ext>
+    </p:extLst>
+  </p:cSld>
+  <p:clrMapOvr>
+    <a:masterClrMapping/>
+  </p:clrMapOvr>
+</p:sld>
+</file>
+
+<file path=ppt/slides/slide15.xml><?xml version="1.0" encoding="utf-8"?>
+<p:sld xmlns:a="http://schemas.openxmlformats.org/drawingml/2006/main" xmlns:r="http://schemas.openxmlformats.org/officeDocument/2006/relationships" xmlns:p="http://schemas.openxmlformats.org/presentationml/2006/main">
+  <p:cSld>
+    <p:spTree>
+      <p:nvGrpSpPr>
+        <p:cNvPr id="1" name=""/>
+        <p:cNvGrpSpPr/>
+        <p:nvPr/>
+      </p:nvGrpSpPr>
+      <p:grpSpPr>
+        <a:xfrm>
+          <a:off x="0" y="0"/>
+          <a:ext cx="0" cy="0"/>
+          <a:chOff x="0" y="0"/>
+          <a:chExt cx="0" cy="0"/>
+        </a:xfrm>
+      </p:grpSpPr>
+      <p:sp>
+        <p:nvSpPr>
+          <p:cNvPr id="5" name="內容版面配置區 4"/>
+          <p:cNvSpPr>
+            <a:spLocks noGrp="1"/>
+          </p:cNvSpPr>
+          <p:nvPr>
+            <p:ph idx="1"/>
+          </p:nvPr>
+        </p:nvSpPr>
+        <p:spPr>
+          <a:xfrm>
+            <a:off x="0" y="2084851"/>
+            <a:ext cx="12192000" cy="2404863"/>
+          </a:xfrm>
+        </p:spPr>
+        <p:txBody>
+          <a:bodyPr anchor="ctr">
+            <a:normAutofit/>
+          </a:bodyPr>
+          <a:lstStyle/>
+          <a:p>
+            <a:pPr marL="0" indent="0" algn="ctr">
+              <a:buNone/>
+            </a:pPr>
+            <a:r>
+              <a:rPr lang="zh-TW" altLang="en-US" sz="6400" b="1" dirty="0">
+                <a:solidFill>
+                  <a:srgbClr val="660033"/>
+                </a:solidFill>
+                <a:latin typeface="Microsoft JhengHei" panose="020B0604030504040204" pitchFamily="34" charset="-120"/>
+                <a:ea typeface="Microsoft JhengHei" panose="020B0604030504040204" pitchFamily="34" charset="-120"/>
+              </a:rPr>
+              <a:t>十字架上主流寶血</a:t>
+            </a:r>
+          </a:p>
+          <a:p>
+            <a:pPr marL="0" indent="0" algn="ctr">
+              <a:buNone/>
+            </a:pPr>
+            <a:r>
+              <a:rPr lang="zh-TW" altLang="en-US" sz="6400" b="1" dirty="0">
+                <a:solidFill>
+                  <a:srgbClr val="660033"/>
+                </a:solidFill>
+                <a:latin typeface="Microsoft JhengHei" panose="020B0604030504040204" pitchFamily="34" charset="-120"/>
+                <a:ea typeface="Microsoft JhengHei" panose="020B0604030504040204" pitchFamily="34" charset="-120"/>
+              </a:rPr>
+              <a:t>由死復活勝一切</a:t>
+            </a:r>
+          </a:p>
+        </p:txBody>
+      </p:sp>
+      <p:sp>
+        <p:nvSpPr>
+          <p:cNvPr id="3" name="TextBox 2"/>
+          <p:cNvSpPr txBox="1"/>
+          <p:nvPr/>
+        </p:nvSpPr>
+        <p:spPr>
+          <a:xfrm>
+            <a:off x="0" y="5061181"/>
+            <a:ext cx="12192000" cy="666786"/>
+          </a:xfrm>
+          <a:prstGeom prst="rect">
+            <a:avLst/>
+          </a:prstGeom>
+          <a:noFill/>
+        </p:spPr>
+        <p:txBody>
+          <a:bodyPr wrap="square" rtlCol="0">
+            <a:spAutoFit/>
+          </a:bodyPr>
+          <a:lstStyle/>
+          <a:p>
+            <a:pPr algn="ctr"/>
+            <a:r>
+              <a:rPr lang="en-US" sz="3733" b="1" dirty="0">
+                <a:solidFill>
+                  <a:srgbClr val="660033"/>
+                </a:solidFill>
+              </a:rPr>
+              <a:t>( 4 / 5 )</a:t>
+            </a:r>
+            <a:endParaRPr lang="vi-VN" sz="3733" b="1" dirty="0">
+              <a:solidFill>
+                <a:srgbClr val="660033"/>
+              </a:solidFill>
+            </a:endParaRPr>
+          </a:p>
+        </p:txBody>
+      </p:sp>
+    </p:spTree>
+    <p:extLst>
+      <p:ext uri="{BB962C8B-B14F-4D97-AF65-F5344CB8AC3E}">
+        <p14:creationId xmlns:p14="http://schemas.microsoft.com/office/powerpoint/2010/main" val="2258976662"/>
+      </p:ext>
+    </p:extLst>
+  </p:cSld>
+  <p:clrMapOvr>
+    <a:masterClrMapping/>
+  </p:clrMapOvr>
+</p:sld>
+</file>
+
+<file path=ppt/slides/slide16.xml><?xml version="1.0" encoding="utf-8"?>
+<p:sld xmlns:a="http://schemas.openxmlformats.org/drawingml/2006/main" xmlns:r="http://schemas.openxmlformats.org/officeDocument/2006/relationships" xmlns:p="http://schemas.openxmlformats.org/presentationml/2006/main">
+  <p:cSld>
+    <p:spTree>
+      <p:nvGrpSpPr>
+        <p:cNvPr id="1" name=""/>
+        <p:cNvGrpSpPr/>
+        <p:nvPr/>
+      </p:nvGrpSpPr>
+      <p:grpSpPr>
+        <a:xfrm>
+          <a:off x="0" y="0"/>
+          <a:ext cx="0" cy="0"/>
+          <a:chOff x="0" y="0"/>
+          <a:chExt cx="0" cy="0"/>
+        </a:xfrm>
+      </p:grpSpPr>
+      <p:sp>
+        <p:nvSpPr>
+          <p:cNvPr id="5" name="內容版面配置區 4"/>
+          <p:cNvSpPr>
+            <a:spLocks noGrp="1"/>
+          </p:cNvSpPr>
+          <p:nvPr>
+            <p:ph idx="1"/>
+          </p:nvPr>
+        </p:nvSpPr>
+        <p:spPr>
+          <a:xfrm>
+            <a:off x="0" y="2084851"/>
+            <a:ext cx="12192000" cy="2404863"/>
+          </a:xfrm>
+        </p:spPr>
+        <p:txBody>
+          <a:bodyPr anchor="ctr">
+            <a:normAutofit/>
+          </a:bodyPr>
+          <a:lstStyle/>
+          <a:p>
+            <a:pPr marL="0" indent="0" algn="ctr">
+              <a:buNone/>
+            </a:pPr>
+            <a:r>
+              <a:rPr lang="zh-TW" altLang="en-US" sz="6400" b="1" dirty="0">
+                <a:solidFill>
+                  <a:srgbClr val="660033"/>
+                </a:solidFill>
+                <a:latin typeface="Microsoft JhengHei" panose="020B0604030504040204" pitchFamily="34" charset="-120"/>
+                <a:ea typeface="Microsoft JhengHei" panose="020B0604030504040204" pitchFamily="34" charset="-120"/>
+              </a:rPr>
+              <a:t>愛何等大  恩何等深</a:t>
+            </a:r>
+          </a:p>
+          <a:p>
+            <a:pPr marL="0" indent="0" algn="ctr">
+              <a:buNone/>
+            </a:pPr>
+            <a:r>
+              <a:rPr lang="zh-TW" altLang="en-US" sz="6400" b="1" dirty="0">
+                <a:solidFill>
+                  <a:srgbClr val="660033"/>
+                </a:solidFill>
+                <a:latin typeface="Microsoft JhengHei" panose="020B0604030504040204" pitchFamily="34" charset="-120"/>
+                <a:ea typeface="Microsoft JhengHei" panose="020B0604030504040204" pitchFamily="34" charset="-120"/>
+              </a:rPr>
+              <a:t>主如此</a:t>
+            </a:r>
+            <a:r>
+              <a:rPr lang="zh-CN" altLang="zh-TW" sz="6400" b="1" dirty="0">
+                <a:solidFill>
+                  <a:srgbClr val="660033"/>
+                </a:solidFill>
+                <a:latin typeface="Microsoft JhengHei" panose="020B0604030504040204" pitchFamily="34" charset="-120"/>
+                <a:ea typeface="Microsoft JhengHei" panose="020B0604030504040204" pitchFamily="34" charset="-120"/>
+              </a:rPr>
+              <a:t>愛</a:t>
+            </a:r>
+            <a:r>
+              <a:rPr lang="zh-TW" altLang="en-US" sz="6400" b="1" dirty="0">
+                <a:solidFill>
+                  <a:srgbClr val="660033"/>
+                </a:solidFill>
+                <a:latin typeface="Microsoft JhengHei" panose="020B0604030504040204" pitchFamily="34" charset="-120"/>
+                <a:ea typeface="Microsoft JhengHei" panose="020B0604030504040204" pitchFamily="34" charset="-120"/>
+              </a:rPr>
+              <a:t>我罪人</a:t>
+            </a:r>
+          </a:p>
+        </p:txBody>
+      </p:sp>
+    </p:spTree>
+    <p:extLst>
+      <p:ext uri="{BB962C8B-B14F-4D97-AF65-F5344CB8AC3E}">
+        <p14:creationId xmlns:p14="http://schemas.microsoft.com/office/powerpoint/2010/main" val="3363043989"/>
+      </p:ext>
+    </p:extLst>
+  </p:cSld>
+  <p:clrMapOvr>
+    <a:masterClrMapping/>
+  </p:clrMapOvr>
+</p:sld>
+</file>
+
+<file path=ppt/slides/slide17.xml><?xml version="1.0" encoding="utf-8"?>
+<p:sld xmlns:a="http://schemas.openxmlformats.org/drawingml/2006/main" xmlns:r="http://schemas.openxmlformats.org/officeDocument/2006/relationships" xmlns:p="http://schemas.openxmlformats.org/presentationml/2006/main">
+  <p:cSld>
+    <p:spTree>
+      <p:nvGrpSpPr>
+        <p:cNvPr id="1" name=""/>
+        <p:cNvGrpSpPr/>
+        <p:nvPr/>
+      </p:nvGrpSpPr>
+      <p:grpSpPr>
+        <a:xfrm>
+          <a:off x="0" y="0"/>
+          <a:ext cx="0" cy="0"/>
+          <a:chOff x="0" y="0"/>
+          <a:chExt cx="0" cy="0"/>
+        </a:xfrm>
+      </p:grpSpPr>
+      <p:sp>
+        <p:nvSpPr>
+          <p:cNvPr id="5" name="內容版面配置區 4"/>
+          <p:cNvSpPr>
+            <a:spLocks noGrp="1"/>
+          </p:cNvSpPr>
+          <p:nvPr>
+            <p:ph idx="1"/>
+          </p:nvPr>
+        </p:nvSpPr>
+        <p:spPr>
+          <a:xfrm>
+            <a:off x="0" y="2084851"/>
+            <a:ext cx="12192000" cy="2404863"/>
+          </a:xfrm>
+        </p:spPr>
+        <p:txBody>
+          <a:bodyPr anchor="ctr">
+            <a:normAutofit/>
+          </a:bodyPr>
+          <a:lstStyle/>
+          <a:p>
+            <a:pPr marL="0" indent="0" algn="ctr">
+              <a:buNone/>
+            </a:pPr>
+            <a:r>
+              <a:rPr lang="zh-TW" altLang="en-US" sz="6400" b="1" dirty="0">
+                <a:solidFill>
+                  <a:srgbClr val="660033"/>
+                </a:solidFill>
+                <a:latin typeface="Microsoft JhengHei" panose="020B0604030504040204" pitchFamily="34" charset="-120"/>
+                <a:ea typeface="Microsoft JhengHei" panose="020B0604030504040204" pitchFamily="34" charset="-120"/>
+              </a:rPr>
+              <a:t>愛何等大  恩何等深</a:t>
+            </a:r>
+          </a:p>
+          <a:p>
+            <a:pPr marL="0" indent="0" algn="ctr">
+              <a:buNone/>
+            </a:pPr>
+            <a:r>
+              <a:rPr lang="zh-TW" altLang="en-US" sz="6400" b="1" dirty="0">
+                <a:solidFill>
+                  <a:srgbClr val="660033"/>
+                </a:solidFill>
+                <a:latin typeface="Microsoft JhengHei" panose="020B0604030504040204" pitchFamily="34" charset="-120"/>
+                <a:ea typeface="Microsoft JhengHei" panose="020B0604030504040204" pitchFamily="34" charset="-120"/>
+              </a:rPr>
+              <a:t>我要永遠讚主恩</a:t>
+            </a:r>
+          </a:p>
+        </p:txBody>
+      </p:sp>
+    </p:spTree>
+    <p:extLst>
+      <p:ext uri="{BB962C8B-B14F-4D97-AF65-F5344CB8AC3E}">
+        <p14:creationId xmlns:p14="http://schemas.microsoft.com/office/powerpoint/2010/main" val="2216058857"/>
+      </p:ext>
+    </p:extLst>
+  </p:cSld>
+  <p:clrMapOvr>
+    <a:masterClrMapping/>
+  </p:clrMapOvr>
+</p:sld>
+</file>
+
+<file path=ppt/slides/slide18.xml><?xml version="1.0" encoding="utf-8"?>
+<p:sld xmlns:a="http://schemas.openxmlformats.org/drawingml/2006/main" xmlns:r="http://schemas.openxmlformats.org/officeDocument/2006/relationships" xmlns:p="http://schemas.openxmlformats.org/presentationml/2006/main">
+  <p:cSld>
+    <p:spTree>
+      <p:nvGrpSpPr>
+        <p:cNvPr id="1" name=""/>
+        <p:cNvGrpSpPr/>
+        <p:nvPr/>
+      </p:nvGrpSpPr>
+      <p:grpSpPr>
+        <a:xfrm>
+          <a:off x="0" y="0"/>
+          <a:ext cx="0" cy="0"/>
+          <a:chOff x="0" y="0"/>
+          <a:chExt cx="0" cy="0"/>
+        </a:xfrm>
+      </p:grpSpPr>
+      <p:sp>
+        <p:nvSpPr>
+          <p:cNvPr id="5" name="內容版面配置區 4"/>
+          <p:cNvSpPr>
+            <a:spLocks noGrp="1"/>
+          </p:cNvSpPr>
+          <p:nvPr>
+            <p:ph idx="1"/>
+          </p:nvPr>
+        </p:nvSpPr>
+        <p:spPr>
+          <a:xfrm>
+            <a:off x="0" y="2084851"/>
+            <a:ext cx="12192000" cy="2404863"/>
+          </a:xfrm>
+        </p:spPr>
+        <p:txBody>
+          <a:bodyPr anchor="ctr">
+            <a:normAutofit/>
+          </a:bodyPr>
+          <a:lstStyle/>
+          <a:p>
+            <a:pPr marL="0" indent="0" algn="ctr">
+              <a:buNone/>
+            </a:pPr>
+            <a:r>
+              <a:rPr lang="zh-TW" altLang="en-US" sz="6400" b="1" dirty="0">
+                <a:solidFill>
+                  <a:srgbClr val="660033"/>
+                </a:solidFill>
+                <a:latin typeface="Microsoft JhengHei" panose="020B0604030504040204" pitchFamily="34" charset="-120"/>
+                <a:ea typeface="Microsoft JhengHei" panose="020B0604030504040204" pitchFamily="34" charset="-120"/>
+              </a:rPr>
+              <a:t>同救贖者在榮耀中</a:t>
+            </a:r>
+          </a:p>
+          <a:p>
+            <a:pPr marL="0" indent="0" algn="ctr">
+              <a:buNone/>
+            </a:pPr>
+            <a:r>
+              <a:rPr lang="zh-TW" altLang="en-US" sz="6400" b="1" dirty="0">
+                <a:solidFill>
+                  <a:srgbClr val="660033"/>
+                </a:solidFill>
+                <a:latin typeface="Microsoft JhengHei" panose="020B0604030504040204" pitchFamily="34" charset="-120"/>
+                <a:ea typeface="Microsoft JhengHei" panose="020B0604030504040204" pitchFamily="34" charset="-120"/>
+              </a:rPr>
+              <a:t>見主聖容樂無窮</a:t>
+            </a:r>
+          </a:p>
+        </p:txBody>
+      </p:sp>
+      <p:sp>
+        <p:nvSpPr>
+          <p:cNvPr id="3" name="TextBox 2"/>
+          <p:cNvSpPr txBox="1"/>
+          <p:nvPr/>
+        </p:nvSpPr>
+        <p:spPr>
+          <a:xfrm>
+            <a:off x="0" y="5061181"/>
+            <a:ext cx="12192000" cy="666786"/>
+          </a:xfrm>
+          <a:prstGeom prst="rect">
+            <a:avLst/>
+          </a:prstGeom>
+          <a:noFill/>
+        </p:spPr>
+        <p:txBody>
+          <a:bodyPr wrap="square" rtlCol="0">
+            <a:spAutoFit/>
+          </a:bodyPr>
+          <a:lstStyle/>
+          <a:p>
+            <a:pPr algn="ctr"/>
+            <a:r>
+              <a:rPr lang="en-US" sz="3733" b="1" dirty="0">
+                <a:solidFill>
+                  <a:srgbClr val="660033"/>
+                </a:solidFill>
+              </a:rPr>
+              <a:t>( 5 / 5 )</a:t>
+            </a:r>
+            <a:endParaRPr lang="vi-VN" sz="3733" b="1" dirty="0">
+              <a:solidFill>
+                <a:srgbClr val="660033"/>
+              </a:solidFill>
+            </a:endParaRPr>
+          </a:p>
+        </p:txBody>
+      </p:sp>
+    </p:spTree>
+    <p:extLst>
+      <p:ext uri="{BB962C8B-B14F-4D97-AF65-F5344CB8AC3E}">
+        <p14:creationId xmlns:p14="http://schemas.microsoft.com/office/powerpoint/2010/main" val="1593673800"/>
+      </p:ext>
+    </p:extLst>
+  </p:cSld>
+  <p:clrMapOvr>
+    <a:masterClrMapping/>
+  </p:clrMapOvr>
+</p:sld>
+</file>
+
+<file path=ppt/slides/slide19.xml><?xml version="1.0" encoding="utf-8"?>
+<p:sld xmlns:a="http://schemas.openxmlformats.org/drawingml/2006/main" xmlns:r="http://schemas.openxmlformats.org/officeDocument/2006/relationships" xmlns:p="http://schemas.openxmlformats.org/presentationml/2006/main">
+  <p:cSld>
+    <p:spTree>
+      <p:nvGrpSpPr>
+        <p:cNvPr id="1" name=""/>
+        <p:cNvGrpSpPr/>
+        <p:nvPr/>
+      </p:nvGrpSpPr>
+      <p:grpSpPr>
+        <a:xfrm>
+          <a:off x="0" y="0"/>
+          <a:ext cx="0" cy="0"/>
+          <a:chOff x="0" y="0"/>
+          <a:chExt cx="0" cy="0"/>
+        </a:xfrm>
+      </p:grpSpPr>
+      <p:sp>
+        <p:nvSpPr>
+          <p:cNvPr id="5" name="內容版面配置區 4"/>
+          <p:cNvSpPr>
+            <a:spLocks noGrp="1"/>
+          </p:cNvSpPr>
+          <p:nvPr>
+            <p:ph idx="1"/>
+          </p:nvPr>
+        </p:nvSpPr>
+        <p:spPr>
+          <a:xfrm>
+            <a:off x="0" y="2084851"/>
+            <a:ext cx="12192000" cy="2404863"/>
+          </a:xfrm>
+        </p:spPr>
+        <p:txBody>
+          <a:bodyPr anchor="ctr">
+            <a:normAutofit/>
+          </a:bodyPr>
+          <a:lstStyle/>
+          <a:p>
+            <a:pPr marL="0" indent="0" algn="ctr">
+              <a:buNone/>
+            </a:pPr>
+            <a:r>
+              <a:rPr lang="zh-TW" altLang="en-US" sz="6400" b="1" dirty="0">
+                <a:solidFill>
+                  <a:srgbClr val="660033"/>
+                </a:solidFill>
+                <a:latin typeface="Microsoft JhengHei" panose="020B0604030504040204" pitchFamily="34" charset="-120"/>
+                <a:ea typeface="Microsoft JhengHei" panose="020B0604030504040204" pitchFamily="34" charset="-120"/>
+              </a:rPr>
+              <a:t>平安愉快度此永年</a:t>
+            </a:r>
+          </a:p>
+          <a:p>
+            <a:pPr marL="0" indent="0" algn="ctr">
+              <a:buNone/>
+            </a:pPr>
+            <a:r>
+              <a:rPr lang="zh-TW" altLang="en-US" sz="6400" b="1" dirty="0">
+                <a:solidFill>
+                  <a:srgbClr val="660033"/>
+                </a:solidFill>
+                <a:latin typeface="Microsoft JhengHei" panose="020B0604030504040204" pitchFamily="34" charset="-120"/>
+                <a:ea typeface="Microsoft JhengHei" panose="020B0604030504040204" pitchFamily="34" charset="-120"/>
+              </a:rPr>
+              <a:t>高唱主恩愛無邊</a:t>
+            </a:r>
+          </a:p>
+        </p:txBody>
+      </p:sp>
+      <p:sp>
+        <p:nvSpPr>
+          <p:cNvPr id="3" name="TextBox 2"/>
+          <p:cNvSpPr txBox="1"/>
+          <p:nvPr/>
+        </p:nvSpPr>
+        <p:spPr>
+          <a:xfrm>
+            <a:off x="0" y="5061181"/>
+            <a:ext cx="12192000" cy="666786"/>
+          </a:xfrm>
+          <a:prstGeom prst="rect">
+            <a:avLst/>
+          </a:prstGeom>
+          <a:noFill/>
+        </p:spPr>
+        <p:txBody>
+          <a:bodyPr wrap="square" rtlCol="0">
+            <a:spAutoFit/>
+          </a:bodyPr>
+          <a:lstStyle/>
+          <a:p>
+            <a:pPr algn="ctr"/>
+            <a:r>
+              <a:rPr lang="en-US" sz="3733" b="1" dirty="0">
+                <a:solidFill>
+                  <a:srgbClr val="660033"/>
+                </a:solidFill>
+              </a:rPr>
+              <a:t>( 5 / 5 )</a:t>
+            </a:r>
+            <a:endParaRPr lang="vi-VN" sz="3733" b="1" dirty="0">
+              <a:solidFill>
+                <a:srgbClr val="660033"/>
+              </a:solidFill>
+            </a:endParaRPr>
+          </a:p>
+        </p:txBody>
+      </p:sp>
+    </p:spTree>
+    <p:extLst>
+      <p:ext uri="{BB962C8B-B14F-4D97-AF65-F5344CB8AC3E}">
+        <p14:creationId xmlns:p14="http://schemas.microsoft.com/office/powerpoint/2010/main" val="4149442896"/>
       </p:ext>
     </p:extLst>
   </p:cSld>
@@ -4120,57 +5009,129 @@
       </p:grpSpPr>
       <p:sp>
         <p:nvSpPr>
-          <p:cNvPr id="4" name="Title 3"/>
-          <p:cNvSpPr>
-            <a:spLocks noGrp="1"/>
-          </p:cNvSpPr>
-          <p:nvPr>
-            <p:ph type="title"/>
-          </p:nvPr>
-        </p:nvSpPr>
-        <p:spPr/>
-        <p:txBody>
-          <a:bodyPr>
+          <p:cNvPr id="5" name="內容版面配置區 4"/>
+          <p:cNvSpPr>
+            <a:spLocks noGrp="1"/>
+          </p:cNvSpPr>
+          <p:nvPr>
+            <p:ph idx="1"/>
+          </p:nvPr>
+        </p:nvSpPr>
+        <p:spPr>
+          <a:xfrm>
+            <a:off x="0" y="2084851"/>
+            <a:ext cx="12192000" cy="2404863"/>
+          </a:xfrm>
+        </p:spPr>
+        <p:txBody>
+          <a:bodyPr anchor="ctr">
             <a:normAutofit/>
           </a:bodyPr>
           <a:lstStyle/>
           <a:p>
-            <a:r>
-              <a:rPr lang="en-US" altLang="zh-CN" sz="4800" b="1" dirty="0">
+            <a:pPr marL="0" indent="0" algn="ctr">
+              <a:buNone/>
+            </a:pPr>
+            <a:r>
+              <a:rPr lang="zh-TW" altLang="en-US" sz="6400" b="1" dirty="0">
                 <a:solidFill>
                   <a:srgbClr val="660033"/>
                 </a:solidFill>
                 <a:latin typeface="Microsoft JhengHei" panose="020B0604030504040204" pitchFamily="34" charset="-120"/>
                 <a:ea typeface="Microsoft JhengHei" panose="020B0604030504040204" pitchFamily="34" charset="-120"/>
               </a:rPr>
-              <a:t>【</a:t>
-            </a:r>
-            <a:r>
-              <a:rPr lang="zh-CN" altLang="en-US" sz="4800" b="1" dirty="0">
+              <a:t>拿撒勒人耶穌面前</a:t>
+            </a:r>
+          </a:p>
+          <a:p>
+            <a:pPr marL="0" indent="0" algn="ctr">
+              <a:buNone/>
+            </a:pPr>
+            <a:r>
+              <a:rPr lang="zh-TW" altLang="en-US" sz="6400" b="1" dirty="0">
                 <a:solidFill>
                   <a:srgbClr val="660033"/>
                 </a:solidFill>
                 <a:latin typeface="Microsoft JhengHei" panose="020B0604030504040204" pitchFamily="34" charset="-120"/>
                 <a:ea typeface="Microsoft JhengHei" panose="020B0604030504040204" pitchFamily="34" charset="-120"/>
               </a:rPr>
-              <a:t>救主的愛</a:t>
-            </a:r>
-            <a:r>
-              <a:rPr lang="en-US" altLang="zh-CN" sz="4800" b="1" dirty="0">
+              <a:t>我站立心便愕然</a:t>
+            </a:r>
+          </a:p>
+        </p:txBody>
+      </p:sp>
+      <p:sp>
+        <p:nvSpPr>
+          <p:cNvPr id="3" name="TextBox 2"/>
+          <p:cNvSpPr txBox="1"/>
+          <p:nvPr/>
+        </p:nvSpPr>
+        <p:spPr>
+          <a:xfrm>
+            <a:off x="0" y="5061181"/>
+            <a:ext cx="12192000" cy="666786"/>
+          </a:xfrm>
+          <a:prstGeom prst="rect">
+            <a:avLst/>
+          </a:prstGeom>
+          <a:noFill/>
+        </p:spPr>
+        <p:txBody>
+          <a:bodyPr wrap="square" rtlCol="0">
+            <a:spAutoFit/>
+          </a:bodyPr>
+          <a:lstStyle/>
+          <a:p>
+            <a:pPr algn="ctr"/>
+            <a:r>
+              <a:rPr lang="en-US" sz="3733" b="1" dirty="0">
                 <a:solidFill>
                   <a:srgbClr val="660033"/>
                 </a:solidFill>
-                <a:latin typeface="Microsoft JhengHei" panose="020B0604030504040204" pitchFamily="34" charset="-120"/>
-                <a:ea typeface="Microsoft JhengHei" panose="020B0604030504040204" pitchFamily="34" charset="-120"/>
               </a:rPr>
-              <a:t>】</a:t>
-            </a:r>
-          </a:p>
-        </p:txBody>
-      </p:sp>
-      <p:sp>
-        <p:nvSpPr>
-          <p:cNvPr id="5" name="Content Placeholder 4"/>
+              <a:t>( 1 / 5 )</a:t>
+            </a:r>
+            <a:endParaRPr lang="vi-VN" sz="3733" b="1" dirty="0">
+              <a:solidFill>
+                <a:srgbClr val="660033"/>
+              </a:solidFill>
+            </a:endParaRPr>
+          </a:p>
+        </p:txBody>
+      </p:sp>
+    </p:spTree>
+    <p:extLst>
+      <p:ext uri="{BB962C8B-B14F-4D97-AF65-F5344CB8AC3E}">
+        <p14:creationId xmlns:p14="http://schemas.microsoft.com/office/powerpoint/2010/main" val="1407003638"/>
+      </p:ext>
+    </p:extLst>
+  </p:cSld>
+  <p:clrMapOvr>
+    <a:masterClrMapping/>
+  </p:clrMapOvr>
+</p:sld>
+</file>
+
+<file path=ppt/slides/slide20.xml><?xml version="1.0" encoding="utf-8"?>
+<p:sld xmlns:a="http://schemas.openxmlformats.org/drawingml/2006/main" xmlns:r="http://schemas.openxmlformats.org/officeDocument/2006/relationships" xmlns:p="http://schemas.openxmlformats.org/presentationml/2006/main">
+  <p:cSld>
+    <p:spTree>
+      <p:nvGrpSpPr>
+        <p:cNvPr id="1" name=""/>
+        <p:cNvGrpSpPr/>
+        <p:nvPr/>
+      </p:nvGrpSpPr>
+      <p:grpSpPr>
+        <a:xfrm>
+          <a:off x="0" y="0"/>
+          <a:ext cx="0" cy="0"/>
+          <a:chOff x="0" y="0"/>
+          <a:chExt cx="0" cy="0"/>
+        </a:xfrm>
+      </p:grpSpPr>
+      <p:sp>
+        <p:nvSpPr>
+          <p:cNvPr id="5" name="內容版面配置區 4"/>
           <p:cNvSpPr>
             <a:spLocks noGrp="1"/>
           </p:cNvSpPr>
@@ -4178,10 +5139,15 @@
             <p:ph idx="1"/>
           </p:nvPr>
         </p:nvSpPr>
-        <p:spPr/>
-        <p:txBody>
-          <a:bodyPr>
-            <a:noAutofit/>
+        <p:spPr>
+          <a:xfrm>
+            <a:off x="0" y="2084851"/>
+            <a:ext cx="12192000" cy="2404863"/>
+          </a:xfrm>
+        </p:spPr>
+        <p:txBody>
+          <a:bodyPr anchor="ctr">
+            <a:normAutofit/>
           </a:bodyPr>
           <a:lstStyle/>
           <a:p>
@@ -4189,7 +5155,7 @@
               <a:buNone/>
             </a:pPr>
             <a:r>
-              <a:rPr lang="zh-TW" altLang="en-US" sz="5400" b="1" dirty="0">
+              <a:rPr lang="zh-TW" altLang="en-US" sz="6400" b="1" dirty="0">
                 <a:solidFill>
                   <a:srgbClr val="660033"/>
                 </a:solidFill>
@@ -4204,7 +5170,7 @@
               <a:buNone/>
             </a:pPr>
             <a:r>
-              <a:rPr lang="zh-TW" altLang="en-US" sz="5400" b="1" dirty="0">
+              <a:rPr lang="zh-TW" altLang="en-US" sz="6400" b="1" dirty="0">
                 <a:solidFill>
                   <a:srgbClr val="660033"/>
                 </a:solidFill>
@@ -4214,7 +5180,7 @@
               <a:t>主如此</a:t>
             </a:r>
             <a:r>
-              <a:rPr lang="zh-CN" altLang="zh-TW" sz="5400" b="1" dirty="0">
+              <a:rPr lang="zh-CN" altLang="zh-TW" sz="6400" b="1" dirty="0">
                 <a:solidFill>
                   <a:srgbClr val="660033"/>
                 </a:solidFill>
@@ -4224,7 +5190,7 @@
               <a:t>愛</a:t>
             </a:r>
             <a:r>
-              <a:rPr lang="zh-TW" altLang="en-US" sz="5400" b="1" dirty="0">
+              <a:rPr lang="zh-TW" altLang="en-US" sz="6400" b="1" dirty="0">
                 <a:solidFill>
                   <a:srgbClr val="660033"/>
                 </a:solidFill>
@@ -4234,12 +5200,65 @@
               <a:t>我罪人</a:t>
             </a:r>
           </a:p>
+        </p:txBody>
+      </p:sp>
+    </p:spTree>
+    <p:extLst>
+      <p:ext uri="{BB962C8B-B14F-4D97-AF65-F5344CB8AC3E}">
+        <p14:creationId xmlns:p14="http://schemas.microsoft.com/office/powerpoint/2010/main" val="4040481571"/>
+      </p:ext>
+    </p:extLst>
+  </p:cSld>
+  <p:clrMapOvr>
+    <a:masterClrMapping/>
+  </p:clrMapOvr>
+</p:sld>
+</file>
+
+<file path=ppt/slides/slide21.xml><?xml version="1.0" encoding="utf-8"?>
+<p:sld xmlns:a="http://schemas.openxmlformats.org/drawingml/2006/main" xmlns:r="http://schemas.openxmlformats.org/officeDocument/2006/relationships" xmlns:p="http://schemas.openxmlformats.org/presentationml/2006/main">
+  <p:cSld>
+    <p:spTree>
+      <p:nvGrpSpPr>
+        <p:cNvPr id="1" name=""/>
+        <p:cNvGrpSpPr/>
+        <p:nvPr/>
+      </p:nvGrpSpPr>
+      <p:grpSpPr>
+        <a:xfrm>
+          <a:off x="0" y="0"/>
+          <a:ext cx="0" cy="0"/>
+          <a:chOff x="0" y="0"/>
+          <a:chExt cx="0" cy="0"/>
+        </a:xfrm>
+      </p:grpSpPr>
+      <p:sp>
+        <p:nvSpPr>
+          <p:cNvPr id="5" name="內容版面配置區 4"/>
+          <p:cNvSpPr>
+            <a:spLocks noGrp="1"/>
+          </p:cNvSpPr>
+          <p:nvPr>
+            <p:ph idx="1"/>
+          </p:nvPr>
+        </p:nvSpPr>
+        <p:spPr>
+          <a:xfrm>
+            <a:off x="0" y="2084851"/>
+            <a:ext cx="12192000" cy="2404863"/>
+          </a:xfrm>
+        </p:spPr>
+        <p:txBody>
+          <a:bodyPr anchor="ctr">
+            <a:normAutofit/>
+          </a:bodyPr>
+          <a:lstStyle/>
           <a:p>
             <a:pPr marL="0" indent="0" algn="ctr">
               <a:buNone/>
             </a:pPr>
             <a:r>
-              <a:rPr lang="zh-TW" altLang="en-US" sz="5400" b="1" dirty="0">
+              <a:rPr lang="zh-TW" altLang="en-US" sz="6400" b="1" dirty="0">
                 <a:solidFill>
                   <a:srgbClr val="660033"/>
                 </a:solidFill>
@@ -4254,7 +5273,7 @@
               <a:buNone/>
             </a:pPr>
             <a:r>
-              <a:rPr lang="zh-TW" altLang="en-US" sz="5400" b="1" dirty="0">
+              <a:rPr lang="zh-TW" altLang="en-US" sz="6400" b="1" dirty="0">
                 <a:solidFill>
                   <a:srgbClr val="660033"/>
                 </a:solidFill>
@@ -4269,7 +5288,7 @@
     </p:spTree>
     <p:extLst>
       <p:ext uri="{BB962C8B-B14F-4D97-AF65-F5344CB8AC3E}">
-        <p14:creationId xmlns:p14="http://schemas.microsoft.com/office/powerpoint/2010/main" val="3918129689"/>
+        <p14:creationId xmlns:p14="http://schemas.microsoft.com/office/powerpoint/2010/main" val="3834543957"/>
       </p:ext>
     </p:extLst>
   </p:cSld>
@@ -4298,176 +5317,109 @@
       </p:grpSpPr>
       <p:sp>
         <p:nvSpPr>
-          <p:cNvPr id="4" name="Title 3"/>
-          <p:cNvSpPr>
-            <a:spLocks noGrp="1"/>
-          </p:cNvSpPr>
-          <p:nvPr>
-            <p:ph type="title"/>
-          </p:nvPr>
-        </p:nvSpPr>
-        <p:spPr/>
-        <p:txBody>
-          <a:bodyPr>
+          <p:cNvPr id="5" name="內容版面配置區 4"/>
+          <p:cNvSpPr>
+            <a:spLocks noGrp="1"/>
+          </p:cNvSpPr>
+          <p:nvPr>
+            <p:ph idx="1"/>
+          </p:nvPr>
+        </p:nvSpPr>
+        <p:spPr>
+          <a:xfrm>
+            <a:off x="0" y="2084851"/>
+            <a:ext cx="12192000" cy="2404863"/>
+          </a:xfrm>
+        </p:spPr>
+        <p:txBody>
+          <a:bodyPr anchor="ctr">
             <a:normAutofit/>
           </a:bodyPr>
           <a:lstStyle/>
           <a:p>
-            <a:r>
-              <a:rPr lang="en-US" altLang="zh-CN" sz="4800" b="1" dirty="0">
+            <a:pPr marL="0" indent="0" algn="ctr">
+              <a:buNone/>
+            </a:pPr>
+            <a:r>
+              <a:rPr lang="zh-TW" altLang="en-US" sz="6400" b="1" dirty="0">
                 <a:solidFill>
                   <a:srgbClr val="660033"/>
                 </a:solidFill>
                 <a:latin typeface="Microsoft JhengHei" panose="020B0604030504040204" pitchFamily="34" charset="-120"/>
                 <a:ea typeface="Microsoft JhengHei" panose="020B0604030504040204" pitchFamily="34" charset="-120"/>
               </a:rPr>
-              <a:t>【</a:t>
-            </a:r>
-            <a:r>
-              <a:rPr lang="zh-CN" altLang="en-US" sz="4800" b="1" dirty="0">
+              <a:t>希奇他也把我愛憐</a:t>
+            </a:r>
+          </a:p>
+          <a:p>
+            <a:pPr marL="0" indent="0" algn="ctr">
+              <a:buNone/>
+            </a:pPr>
+            <a:r>
+              <a:rPr lang="zh-TW" altLang="en-US" sz="6400" b="1" dirty="0">
                 <a:solidFill>
                   <a:srgbClr val="660033"/>
                 </a:solidFill>
                 <a:latin typeface="Microsoft JhengHei" panose="020B0604030504040204" pitchFamily="34" charset="-120"/>
                 <a:ea typeface="Microsoft JhengHei" panose="020B0604030504040204" pitchFamily="34" charset="-120"/>
               </a:rPr>
-              <a:t>救主的愛</a:t>
-            </a:r>
-            <a:r>
-              <a:rPr lang="en-US" altLang="zh-CN" sz="4800" b="1" dirty="0">
+              <a:t>一切罪</a:t>
+            </a:r>
+            <a:r>
+              <a:rPr lang="zh-CN" altLang="zh-TW" sz="6400" b="1" dirty="0">
                 <a:solidFill>
                   <a:srgbClr val="660033"/>
                 </a:solidFill>
                 <a:latin typeface="Microsoft JhengHei" panose="020B0604030504040204" pitchFamily="34" charset="-120"/>
                 <a:ea typeface="Microsoft JhengHei" panose="020B0604030504040204" pitchFamily="34" charset="-120"/>
               </a:rPr>
-              <a:t>】</a:t>
-            </a:r>
-          </a:p>
-        </p:txBody>
-      </p:sp>
-      <p:sp>
-        <p:nvSpPr>
-          <p:cNvPr id="5" name="Content Placeholder 4"/>
-          <p:cNvSpPr>
-            <a:spLocks noGrp="1"/>
-          </p:cNvSpPr>
-          <p:nvPr>
-            <p:ph idx="1"/>
-          </p:nvPr>
-        </p:nvSpPr>
-        <p:spPr/>
-        <p:txBody>
-          <a:bodyPr>
-            <a:noAutofit/>
-          </a:bodyPr>
-          <a:lstStyle/>
-          <a:p>
-            <a:pPr marL="0" indent="0" algn="ctr">
-              <a:buNone/>
-            </a:pPr>
-            <a:r>
-              <a:rPr lang="zh-TW" altLang="en-US" sz="5400" b="1" dirty="0">
+              <a:t>污</a:t>
+            </a:r>
+            <a:r>
+              <a:rPr lang="zh-TW" altLang="en-US" sz="6400" b="1" dirty="0">
                 <a:solidFill>
                   <a:srgbClr val="660033"/>
                 </a:solidFill>
                 <a:latin typeface="Microsoft JhengHei" panose="020B0604030504040204" pitchFamily="34" charset="-120"/>
                 <a:ea typeface="Microsoft JhengHei" panose="020B0604030504040204" pitchFamily="34" charset="-120"/>
               </a:rPr>
-              <a:t>主為我在園中求祈</a:t>
-            </a:r>
-          </a:p>
-          <a:p>
-            <a:pPr marL="0" indent="0" algn="ctr">
-              <a:buNone/>
-            </a:pPr>
-            <a:r>
-              <a:rPr lang="zh-TW" altLang="en-US" sz="5400" b="1" dirty="0">
-                <a:solidFill>
-                  <a:srgbClr val="660033"/>
-                </a:solidFill>
-                <a:latin typeface="Microsoft JhengHei" panose="020B0604030504040204" pitchFamily="34" charset="-120"/>
-                <a:ea typeface="Microsoft JhengHei" panose="020B0604030504040204" pitchFamily="34" charset="-120"/>
-              </a:rPr>
-              <a:t>父阿願照你旨意</a:t>
-            </a:r>
-          </a:p>
-          <a:p>
-            <a:pPr marL="0" indent="0" algn="ctr">
-              <a:buNone/>
-            </a:pPr>
-            <a:r>
-              <a:rPr lang="zh-TW" altLang="en-US" sz="5400" b="1" dirty="0">
-                <a:solidFill>
-                  <a:srgbClr val="660033"/>
-                </a:solidFill>
-                <a:latin typeface="Microsoft JhengHei" panose="020B0604030504040204" pitchFamily="34" charset="-120"/>
-                <a:ea typeface="Microsoft JhengHei" panose="020B0604030504040204" pitchFamily="34" charset="-120"/>
-              </a:rPr>
-              <a:t>並非自憐痛哭流涕</a:t>
-            </a:r>
-          </a:p>
-          <a:p>
-            <a:pPr marL="0" indent="0" algn="ctr">
-              <a:buNone/>
-            </a:pPr>
-            <a:r>
-              <a:rPr lang="zh-TW" altLang="en-US" sz="5400" b="1" dirty="0">
-                <a:solidFill>
-                  <a:srgbClr val="660033"/>
-                </a:solidFill>
-                <a:latin typeface="Microsoft JhengHei" panose="020B0604030504040204" pitchFamily="34" charset="-120"/>
-                <a:ea typeface="Microsoft JhengHei" panose="020B0604030504040204" pitchFamily="34" charset="-120"/>
-              </a:rPr>
-              <a:t>為我血汗流下地</a:t>
-            </a:r>
-          </a:p>
-        </p:txBody>
-      </p:sp>
-      <p:sp>
-        <p:nvSpPr>
-          <p:cNvPr id="6" name="Text Box 1"/>
+              <a:t>蒙赦免</a:t>
+            </a:r>
+          </a:p>
+        </p:txBody>
+      </p:sp>
+      <p:sp>
+        <p:nvSpPr>
+          <p:cNvPr id="3" name="TextBox 2"/>
           <p:cNvSpPr txBox="1"/>
           <p:nvPr/>
         </p:nvSpPr>
         <p:spPr>
           <a:xfrm>
-            <a:off x="1199456" y="1700808"/>
-            <a:ext cx="1161268" cy="923330"/>
+            <a:off x="0" y="5061181"/>
+            <a:ext cx="12192000" cy="666786"/>
           </a:xfrm>
           <a:prstGeom prst="rect">
             <a:avLst/>
           </a:prstGeom>
           <a:noFill/>
-          <a:ln w="9525">
-            <a:noFill/>
-            <a:miter lim="800000"/>
-          </a:ln>
         </p:spPr>
         <p:txBody>
-          <a:bodyPr wrap="square">
+          <a:bodyPr wrap="square" rtlCol="0">
             <a:spAutoFit/>
           </a:bodyPr>
           <a:lstStyle/>
           <a:p>
             <a:pPr algn="ctr"/>
             <a:r>
-              <a:rPr lang="en-US" sz="5400" b="1" dirty="0">
+              <a:rPr lang="en-US" sz="3733" b="1" dirty="0">
                 <a:solidFill>
                   <a:srgbClr val="660033"/>
                 </a:solidFill>
               </a:rPr>
-              <a:t>2</a:t>
-            </a:r>
-            <a:r>
-              <a:rPr lang="en-US" sz="5400" b="1" dirty="0" smtClean="0">
-                <a:solidFill>
-                  <a:srgbClr val="660033"/>
-                </a:solidFill>
-              </a:rPr>
-              <a:t>.</a:t>
-            </a:r>
-            <a:endParaRPr lang="en-US" sz="5400" b="1" dirty="0">
+              <a:t>( 1 / 5 )</a:t>
+            </a:r>
+            <a:endParaRPr lang="vi-VN" sz="3733" b="1" dirty="0">
               <a:solidFill>
                 <a:srgbClr val="660033"/>
               </a:solidFill>
@@ -4478,7 +5430,7 @@
     </p:spTree>
     <p:extLst>
       <p:ext uri="{BB962C8B-B14F-4D97-AF65-F5344CB8AC3E}">
-        <p14:creationId xmlns:p14="http://schemas.microsoft.com/office/powerpoint/2010/main" val="3623848825"/>
+        <p14:creationId xmlns:p14="http://schemas.microsoft.com/office/powerpoint/2010/main" val="1495300297"/>
       </p:ext>
     </p:extLst>
   </p:cSld>
@@ -4507,76 +5459,31 @@
       </p:grpSpPr>
       <p:sp>
         <p:nvSpPr>
-          <p:cNvPr id="4" name="Title 3"/>
-          <p:cNvSpPr>
-            <a:spLocks noGrp="1"/>
-          </p:cNvSpPr>
-          <p:nvPr>
-            <p:ph type="title"/>
-          </p:nvPr>
-        </p:nvSpPr>
-        <p:spPr/>
-        <p:txBody>
-          <a:bodyPr>
+          <p:cNvPr id="5" name="內容版面配置區 4"/>
+          <p:cNvSpPr>
+            <a:spLocks noGrp="1"/>
+          </p:cNvSpPr>
+          <p:nvPr>
+            <p:ph idx="1"/>
+          </p:nvPr>
+        </p:nvSpPr>
+        <p:spPr>
+          <a:xfrm>
+            <a:off x="0" y="2084851"/>
+            <a:ext cx="12192000" cy="2404863"/>
+          </a:xfrm>
+        </p:spPr>
+        <p:txBody>
+          <a:bodyPr anchor="ctr">
             <a:normAutofit/>
           </a:bodyPr>
           <a:lstStyle/>
           <a:p>
-            <a:r>
-              <a:rPr lang="en-US" altLang="zh-CN" sz="4800" b="1" dirty="0">
-                <a:solidFill>
-                  <a:srgbClr val="660033"/>
-                </a:solidFill>
-                <a:latin typeface="Microsoft JhengHei" panose="020B0604030504040204" pitchFamily="34" charset="-120"/>
-                <a:ea typeface="Microsoft JhengHei" panose="020B0604030504040204" pitchFamily="34" charset="-120"/>
-              </a:rPr>
-              <a:t>【</a:t>
-            </a:r>
-            <a:r>
-              <a:rPr lang="zh-CN" altLang="en-US" sz="4800" b="1" dirty="0">
-                <a:solidFill>
-                  <a:srgbClr val="660033"/>
-                </a:solidFill>
-                <a:latin typeface="Microsoft JhengHei" panose="020B0604030504040204" pitchFamily="34" charset="-120"/>
-                <a:ea typeface="Microsoft JhengHei" panose="020B0604030504040204" pitchFamily="34" charset="-120"/>
-              </a:rPr>
-              <a:t>救主的愛</a:t>
-            </a:r>
-            <a:r>
-              <a:rPr lang="en-US" altLang="zh-CN" sz="4800" b="1" dirty="0">
-                <a:solidFill>
-                  <a:srgbClr val="660033"/>
-                </a:solidFill>
-                <a:latin typeface="Microsoft JhengHei" panose="020B0604030504040204" pitchFamily="34" charset="-120"/>
-                <a:ea typeface="Microsoft JhengHei" panose="020B0604030504040204" pitchFamily="34" charset="-120"/>
-              </a:rPr>
-              <a:t>】</a:t>
-            </a:r>
-          </a:p>
-        </p:txBody>
-      </p:sp>
-      <p:sp>
-        <p:nvSpPr>
-          <p:cNvPr id="5" name="Content Placeholder 4"/>
-          <p:cNvSpPr>
-            <a:spLocks noGrp="1"/>
-          </p:cNvSpPr>
-          <p:nvPr>
-            <p:ph idx="1"/>
-          </p:nvPr>
-        </p:nvSpPr>
-        <p:spPr/>
-        <p:txBody>
-          <a:bodyPr>
-            <a:noAutofit/>
-          </a:bodyPr>
-          <a:lstStyle/>
-          <a:p>
             <a:pPr marL="0" indent="0" algn="ctr">
               <a:buNone/>
             </a:pPr>
             <a:r>
-              <a:rPr lang="zh-TW" altLang="en-US" sz="5400" b="1" dirty="0">
+              <a:rPr lang="zh-TW" altLang="en-US" sz="6400" b="1" dirty="0">
                 <a:solidFill>
                   <a:srgbClr val="660033"/>
                 </a:solidFill>
@@ -4591,7 +5498,7 @@
               <a:buNone/>
             </a:pPr>
             <a:r>
-              <a:rPr lang="zh-TW" altLang="en-US" sz="5400" b="1" dirty="0">
+              <a:rPr lang="zh-TW" altLang="en-US" sz="6400" b="1" dirty="0">
                 <a:solidFill>
                   <a:srgbClr val="660033"/>
                 </a:solidFill>
@@ -4601,7 +5508,7 @@
               <a:t>主如此</a:t>
             </a:r>
             <a:r>
-              <a:rPr lang="zh-CN" altLang="zh-TW" sz="5400" b="1" dirty="0">
+              <a:rPr lang="zh-CN" altLang="zh-TW" sz="6400" b="1" dirty="0">
                 <a:solidFill>
                   <a:srgbClr val="660033"/>
                 </a:solidFill>
@@ -4611,7 +5518,7 @@
               <a:t>愛</a:t>
             </a:r>
             <a:r>
-              <a:rPr lang="zh-TW" altLang="en-US" sz="5400" b="1" dirty="0">
+              <a:rPr lang="zh-TW" altLang="en-US" sz="6400" b="1" dirty="0">
                 <a:solidFill>
                   <a:srgbClr val="660033"/>
                 </a:solidFill>
@@ -4621,42 +5528,12 @@
               <a:t>我罪人</a:t>
             </a:r>
           </a:p>
-          <a:p>
-            <a:pPr marL="0" indent="0" algn="ctr">
-              <a:buNone/>
-            </a:pPr>
-            <a:r>
-              <a:rPr lang="zh-TW" altLang="en-US" sz="5400" b="1" dirty="0">
-                <a:solidFill>
-                  <a:srgbClr val="660033"/>
-                </a:solidFill>
-                <a:latin typeface="Microsoft JhengHei" panose="020B0604030504040204" pitchFamily="34" charset="-120"/>
-                <a:ea typeface="Microsoft JhengHei" panose="020B0604030504040204" pitchFamily="34" charset="-120"/>
-              </a:rPr>
-              <a:t>愛何等大  恩何等深</a:t>
-            </a:r>
-          </a:p>
-          <a:p>
-            <a:pPr marL="0" indent="0" algn="ctr">
-              <a:buNone/>
-            </a:pPr>
-            <a:r>
-              <a:rPr lang="zh-TW" altLang="en-US" sz="5400" b="1" dirty="0">
-                <a:solidFill>
-                  <a:srgbClr val="660033"/>
-                </a:solidFill>
-                <a:latin typeface="Microsoft JhengHei" panose="020B0604030504040204" pitchFamily="34" charset="-120"/>
-                <a:ea typeface="Microsoft JhengHei" panose="020B0604030504040204" pitchFamily="34" charset="-120"/>
-              </a:rPr>
-              <a:t>我要永遠讚主恩</a:t>
-            </a:r>
-          </a:p>
         </p:txBody>
       </p:sp>
     </p:spTree>
     <p:extLst>
       <p:ext uri="{BB962C8B-B14F-4D97-AF65-F5344CB8AC3E}">
-        <p14:creationId xmlns:p14="http://schemas.microsoft.com/office/powerpoint/2010/main" val="4156287515"/>
+        <p14:creationId xmlns:p14="http://schemas.microsoft.com/office/powerpoint/2010/main" val="393768642"/>
       </p:ext>
     </p:extLst>
   </p:cSld>
@@ -4685,207 +5562,61 @@
       </p:grpSpPr>
       <p:sp>
         <p:nvSpPr>
-          <p:cNvPr id="4" name="Title 3"/>
-          <p:cNvSpPr>
-            <a:spLocks noGrp="1"/>
-          </p:cNvSpPr>
-          <p:nvPr>
-            <p:ph type="title"/>
-          </p:nvPr>
-        </p:nvSpPr>
-        <p:spPr/>
-        <p:txBody>
-          <a:bodyPr>
+          <p:cNvPr id="5" name="內容版面配置區 4"/>
+          <p:cNvSpPr>
+            <a:spLocks noGrp="1"/>
+          </p:cNvSpPr>
+          <p:nvPr>
+            <p:ph idx="1"/>
+          </p:nvPr>
+        </p:nvSpPr>
+        <p:spPr>
+          <a:xfrm>
+            <a:off x="0" y="2084851"/>
+            <a:ext cx="12192000" cy="2404863"/>
+          </a:xfrm>
+        </p:spPr>
+        <p:txBody>
+          <a:bodyPr anchor="ctr">
             <a:normAutofit/>
           </a:bodyPr>
           <a:lstStyle/>
           <a:p>
-            <a:r>
-              <a:rPr lang="en-US" altLang="zh-CN" sz="4800" b="1" dirty="0">
+            <a:pPr marL="0" indent="0" algn="ctr">
+              <a:buNone/>
+            </a:pPr>
+            <a:r>
+              <a:rPr lang="zh-TW" altLang="en-US" sz="6400" b="1" dirty="0">
                 <a:solidFill>
                   <a:srgbClr val="660033"/>
                 </a:solidFill>
                 <a:latin typeface="Microsoft JhengHei" panose="020B0604030504040204" pitchFamily="34" charset="-120"/>
                 <a:ea typeface="Microsoft JhengHei" panose="020B0604030504040204" pitchFamily="34" charset="-120"/>
               </a:rPr>
-              <a:t>【</a:t>
-            </a:r>
-            <a:r>
-              <a:rPr lang="zh-CN" altLang="en-US" sz="4800" b="1" dirty="0">
+              <a:t>愛何等大  恩何等深</a:t>
+            </a:r>
+          </a:p>
+          <a:p>
+            <a:pPr marL="0" indent="0" algn="ctr">
+              <a:buNone/>
+            </a:pPr>
+            <a:r>
+              <a:rPr lang="zh-TW" altLang="en-US" sz="6400" b="1" dirty="0">
                 <a:solidFill>
                   <a:srgbClr val="660033"/>
                 </a:solidFill>
                 <a:latin typeface="Microsoft JhengHei" panose="020B0604030504040204" pitchFamily="34" charset="-120"/>
                 <a:ea typeface="Microsoft JhengHei" panose="020B0604030504040204" pitchFamily="34" charset="-120"/>
               </a:rPr>
-              <a:t>救主的愛</a:t>
-            </a:r>
-            <a:r>
-              <a:rPr lang="en-US" altLang="zh-CN" sz="4800" b="1" dirty="0">
-                <a:solidFill>
-                  <a:srgbClr val="660033"/>
-                </a:solidFill>
-                <a:latin typeface="Microsoft JhengHei" panose="020B0604030504040204" pitchFamily="34" charset="-120"/>
-                <a:ea typeface="Microsoft JhengHei" panose="020B0604030504040204" pitchFamily="34" charset="-120"/>
-              </a:rPr>
-              <a:t>】</a:t>
-            </a:r>
-          </a:p>
-        </p:txBody>
-      </p:sp>
-      <p:sp>
-        <p:nvSpPr>
-          <p:cNvPr id="5" name="Content Placeholder 4"/>
-          <p:cNvSpPr>
-            <a:spLocks noGrp="1"/>
-          </p:cNvSpPr>
-          <p:nvPr>
-            <p:ph idx="1"/>
-          </p:nvPr>
-        </p:nvSpPr>
-        <p:spPr/>
-        <p:txBody>
-          <a:bodyPr>
-            <a:noAutofit/>
-          </a:bodyPr>
-          <a:lstStyle/>
-          <a:p>
-            <a:pPr marL="0" indent="0" algn="ctr">
-              <a:buNone/>
-            </a:pPr>
-            <a:r>
-              <a:rPr lang="zh-TW" altLang="en-US" sz="5400" b="1" dirty="0">
-                <a:solidFill>
-                  <a:srgbClr val="660033"/>
-                </a:solidFill>
-                <a:latin typeface="Microsoft JhengHei" panose="020B0604030504040204" pitchFamily="34" charset="-120"/>
-                <a:ea typeface="Microsoft JhengHei" panose="020B0604030504040204" pitchFamily="34" charset="-120"/>
-              </a:rPr>
-              <a:t>主荷</a:t>
-            </a:r>
-            <a:r>
-              <a:rPr lang="zh-CN" altLang="zh-TW" sz="5400" b="1" dirty="0">
-                <a:solidFill>
-                  <a:srgbClr val="660033"/>
-                </a:solidFill>
-                <a:latin typeface="Microsoft JhengHei" panose="020B0604030504040204" pitchFamily="34" charset="-120"/>
-                <a:ea typeface="Microsoft JhengHei" panose="020B0604030504040204" pitchFamily="34" charset="-120"/>
-              </a:rPr>
-              <a:t>重擔</a:t>
-            </a:r>
-            <a:r>
-              <a:rPr lang="zh-TW" altLang="en-US" sz="5400" b="1" dirty="0">
-                <a:solidFill>
-                  <a:srgbClr val="660033"/>
-                </a:solidFill>
-                <a:latin typeface="Microsoft JhengHei" panose="020B0604030504040204" pitchFamily="34" charset="-120"/>
-                <a:ea typeface="Microsoft JhengHei" panose="020B0604030504040204" pitchFamily="34" charset="-120"/>
-              </a:rPr>
-              <a:t>在那夜靜</a:t>
-            </a:r>
-          </a:p>
-          <a:p>
-            <a:pPr marL="0" indent="0" algn="ctr">
-              <a:buNone/>
-            </a:pPr>
-            <a:r>
-              <a:rPr lang="zh-TW" altLang="en-US" sz="5400" b="1" dirty="0">
-                <a:solidFill>
-                  <a:srgbClr val="660033"/>
-                </a:solidFill>
-                <a:latin typeface="Microsoft JhengHei" panose="020B0604030504040204" pitchFamily="34" charset="-120"/>
-                <a:ea typeface="Microsoft JhengHei" panose="020B0604030504040204" pitchFamily="34" charset="-120"/>
-              </a:rPr>
-              <a:t>天使看見發慈心</a:t>
-            </a:r>
-          </a:p>
-          <a:p>
-            <a:pPr marL="0" indent="0" algn="ctr">
-              <a:buNone/>
-            </a:pPr>
-            <a:r>
-              <a:rPr lang="zh-TW" altLang="en-US" sz="5400" b="1" dirty="0">
-                <a:solidFill>
-                  <a:srgbClr val="660033"/>
-                </a:solidFill>
-                <a:latin typeface="Microsoft JhengHei" panose="020B0604030504040204" pitchFamily="34" charset="-120"/>
-                <a:ea typeface="Microsoft JhengHei" panose="020B0604030504040204" pitchFamily="34" charset="-120"/>
-              </a:rPr>
-              <a:t>從光明處毅然降臨</a:t>
-            </a:r>
-          </a:p>
-          <a:p>
-            <a:pPr marL="0" indent="0" algn="ctr">
-              <a:buNone/>
-            </a:pPr>
-            <a:r>
-              <a:rPr lang="zh-TW" altLang="en-US" sz="5400" b="1" dirty="0">
-                <a:solidFill>
-                  <a:srgbClr val="660033"/>
-                </a:solidFill>
-                <a:latin typeface="Microsoft JhengHei" panose="020B0604030504040204" pitchFamily="34" charset="-120"/>
-                <a:ea typeface="Microsoft JhengHei" panose="020B0604030504040204" pitchFamily="34" charset="-120"/>
-              </a:rPr>
-              <a:t>安慰主傷痛苦情</a:t>
-            </a:r>
-          </a:p>
-        </p:txBody>
-      </p:sp>
-      <p:sp>
-        <p:nvSpPr>
-          <p:cNvPr id="6" name="Text Box 1"/>
-          <p:cNvSpPr txBox="1"/>
-          <p:nvPr/>
-        </p:nvSpPr>
-        <p:spPr>
-          <a:xfrm>
-            <a:off x="1199456" y="1700808"/>
-            <a:ext cx="1161268" cy="923330"/>
-          </a:xfrm>
-          <a:prstGeom prst="rect">
-            <a:avLst/>
-          </a:prstGeom>
-          <a:noFill/>
-          <a:ln w="9525">
-            <a:noFill/>
-            <a:miter lim="800000"/>
-          </a:ln>
-        </p:spPr>
-        <p:txBody>
-          <a:bodyPr wrap="square">
-            <a:spAutoFit/>
-          </a:bodyPr>
-          <a:lstStyle/>
-          <a:p>
-            <a:pPr algn="ctr"/>
-            <a:r>
-              <a:rPr lang="en-US" sz="5400" b="1" dirty="0">
-                <a:solidFill>
-                  <a:srgbClr val="660033"/>
-                </a:solidFill>
-              </a:rPr>
-              <a:t>3</a:t>
-            </a:r>
-            <a:r>
-              <a:rPr lang="en-US" sz="5400" b="1" dirty="0" smtClean="0">
-                <a:solidFill>
-                  <a:srgbClr val="660033"/>
-                </a:solidFill>
-              </a:rPr>
-              <a:t>.</a:t>
-            </a:r>
-            <a:endParaRPr lang="en-US" sz="5400" b="1" dirty="0">
-              <a:solidFill>
-                <a:srgbClr val="660033"/>
-              </a:solidFill>
-            </a:endParaRPr>
+              <a:t>我要永遠讚主恩</a:t>
+            </a:r>
           </a:p>
         </p:txBody>
       </p:sp>
     </p:spTree>
     <p:extLst>
       <p:ext uri="{BB962C8B-B14F-4D97-AF65-F5344CB8AC3E}">
-        <p14:creationId xmlns:p14="http://schemas.microsoft.com/office/powerpoint/2010/main" val="3154288306"/>
+        <p14:creationId xmlns:p14="http://schemas.microsoft.com/office/powerpoint/2010/main" val="644707916"/>
       </p:ext>
     </p:extLst>
   </p:cSld>
@@ -4914,156 +5645,100 @@
       </p:grpSpPr>
       <p:sp>
         <p:nvSpPr>
-          <p:cNvPr id="4" name="Title 3"/>
-          <p:cNvSpPr>
-            <a:spLocks noGrp="1"/>
-          </p:cNvSpPr>
-          <p:nvPr>
-            <p:ph type="title"/>
-          </p:nvPr>
-        </p:nvSpPr>
-        <p:spPr/>
-        <p:txBody>
-          <a:bodyPr>
+          <p:cNvPr id="5" name="內容版面配置區 4"/>
+          <p:cNvSpPr>
+            <a:spLocks noGrp="1"/>
+          </p:cNvSpPr>
+          <p:nvPr>
+            <p:ph idx="1"/>
+          </p:nvPr>
+        </p:nvSpPr>
+        <p:spPr>
+          <a:xfrm>
+            <a:off x="0" y="2084851"/>
+            <a:ext cx="12192000" cy="2404863"/>
+          </a:xfrm>
+        </p:spPr>
+        <p:txBody>
+          <a:bodyPr anchor="ctr">
             <a:normAutofit/>
           </a:bodyPr>
           <a:lstStyle/>
           <a:p>
-            <a:r>
-              <a:rPr lang="en-US" altLang="zh-CN" sz="4800" b="1" dirty="0">
+            <a:pPr marL="0" indent="0" algn="ctr">
+              <a:buNone/>
+            </a:pPr>
+            <a:r>
+              <a:rPr lang="zh-TW" altLang="en-US" sz="6400" b="1" dirty="0">
                 <a:solidFill>
                   <a:srgbClr val="660033"/>
                 </a:solidFill>
                 <a:latin typeface="Microsoft JhengHei" panose="020B0604030504040204" pitchFamily="34" charset="-120"/>
                 <a:ea typeface="Microsoft JhengHei" panose="020B0604030504040204" pitchFamily="34" charset="-120"/>
               </a:rPr>
-              <a:t>【</a:t>
-            </a:r>
-            <a:r>
-              <a:rPr lang="zh-CN" altLang="en-US" sz="4800" b="1" dirty="0">
+              <a:t>主為我在園中求祈</a:t>
+            </a:r>
+          </a:p>
+          <a:p>
+            <a:pPr marL="0" indent="0" algn="ctr">
+              <a:buNone/>
+            </a:pPr>
+            <a:r>
+              <a:rPr lang="zh-TW" altLang="en-US" sz="6400" b="1" dirty="0">
                 <a:solidFill>
                   <a:srgbClr val="660033"/>
                 </a:solidFill>
                 <a:latin typeface="Microsoft JhengHei" panose="020B0604030504040204" pitchFamily="34" charset="-120"/>
                 <a:ea typeface="Microsoft JhengHei" panose="020B0604030504040204" pitchFamily="34" charset="-120"/>
               </a:rPr>
-              <a:t>救主的愛</a:t>
-            </a:r>
-            <a:r>
-              <a:rPr lang="en-US" altLang="zh-CN" sz="4800" b="1" dirty="0">
+              <a:t>父阿願照祢旨意</a:t>
+            </a:r>
+          </a:p>
+        </p:txBody>
+      </p:sp>
+      <p:sp>
+        <p:nvSpPr>
+          <p:cNvPr id="3" name="TextBox 2"/>
+          <p:cNvSpPr txBox="1"/>
+          <p:nvPr/>
+        </p:nvSpPr>
+        <p:spPr>
+          <a:xfrm>
+            <a:off x="0" y="5061181"/>
+            <a:ext cx="12192000" cy="666786"/>
+          </a:xfrm>
+          <a:prstGeom prst="rect">
+            <a:avLst/>
+          </a:prstGeom>
+          <a:noFill/>
+        </p:spPr>
+        <p:txBody>
+          <a:bodyPr wrap="square" rtlCol="0">
+            <a:spAutoFit/>
+          </a:bodyPr>
+          <a:lstStyle/>
+          <a:p>
+            <a:pPr algn="ctr"/>
+            <a:r>
+              <a:rPr lang="en-US" sz="3733" b="1" dirty="0">
                 <a:solidFill>
                   <a:srgbClr val="660033"/>
                 </a:solidFill>
-                <a:latin typeface="Microsoft JhengHei" panose="020B0604030504040204" pitchFamily="34" charset="-120"/>
-                <a:ea typeface="Microsoft JhengHei" panose="020B0604030504040204" pitchFamily="34" charset="-120"/>
               </a:rPr>
-              <a:t>】</a:t>
-            </a:r>
-          </a:p>
-        </p:txBody>
-      </p:sp>
-      <p:sp>
-        <p:nvSpPr>
-          <p:cNvPr id="5" name="Content Placeholder 4"/>
-          <p:cNvSpPr>
-            <a:spLocks noGrp="1"/>
-          </p:cNvSpPr>
-          <p:nvPr>
-            <p:ph idx="1"/>
-          </p:nvPr>
-        </p:nvSpPr>
-        <p:spPr/>
-        <p:txBody>
-          <a:bodyPr>
-            <a:noAutofit/>
-          </a:bodyPr>
-          <a:lstStyle/>
-          <a:p>
-            <a:pPr marL="0" indent="0" algn="ctr">
-              <a:buNone/>
-            </a:pPr>
-            <a:r>
-              <a:rPr lang="zh-TW" altLang="en-US" sz="5400" b="1" dirty="0">
-                <a:solidFill>
-                  <a:srgbClr val="660033"/>
-                </a:solidFill>
-                <a:latin typeface="Microsoft JhengHei" panose="020B0604030504040204" pitchFamily="34" charset="-120"/>
-                <a:ea typeface="Microsoft JhengHei" panose="020B0604030504040204" pitchFamily="34" charset="-120"/>
-              </a:rPr>
-              <a:t>愛何等大  恩何等深</a:t>
-            </a:r>
-          </a:p>
-          <a:p>
-            <a:pPr marL="0" indent="0" algn="ctr">
-              <a:buNone/>
-            </a:pPr>
-            <a:r>
-              <a:rPr lang="zh-TW" altLang="en-US" sz="5400" b="1" dirty="0">
-                <a:solidFill>
-                  <a:srgbClr val="660033"/>
-                </a:solidFill>
-                <a:latin typeface="Microsoft JhengHei" panose="020B0604030504040204" pitchFamily="34" charset="-120"/>
-                <a:ea typeface="Microsoft JhengHei" panose="020B0604030504040204" pitchFamily="34" charset="-120"/>
-              </a:rPr>
-              <a:t>主如此</a:t>
-            </a:r>
-            <a:r>
-              <a:rPr lang="zh-CN" altLang="zh-TW" sz="5400" b="1" dirty="0">
-                <a:solidFill>
-                  <a:srgbClr val="660033"/>
-                </a:solidFill>
-                <a:latin typeface="Microsoft JhengHei" panose="020B0604030504040204" pitchFamily="34" charset="-120"/>
-                <a:ea typeface="Microsoft JhengHei" panose="020B0604030504040204" pitchFamily="34" charset="-120"/>
-              </a:rPr>
-              <a:t>愛</a:t>
-            </a:r>
-            <a:r>
-              <a:rPr lang="zh-TW" altLang="en-US" sz="5400" b="1" dirty="0">
-                <a:solidFill>
-                  <a:srgbClr val="660033"/>
-                </a:solidFill>
-                <a:latin typeface="Microsoft JhengHei" panose="020B0604030504040204" pitchFamily="34" charset="-120"/>
-                <a:ea typeface="Microsoft JhengHei" panose="020B0604030504040204" pitchFamily="34" charset="-120"/>
-              </a:rPr>
-              <a:t>我罪人</a:t>
-            </a:r>
-          </a:p>
-          <a:p>
-            <a:pPr marL="0" indent="0" algn="ctr">
-              <a:buNone/>
-            </a:pPr>
-            <a:r>
-              <a:rPr lang="zh-TW" altLang="en-US" sz="5400" b="1" dirty="0">
-                <a:solidFill>
-                  <a:srgbClr val="660033"/>
-                </a:solidFill>
-                <a:latin typeface="Microsoft JhengHei" panose="020B0604030504040204" pitchFamily="34" charset="-120"/>
-                <a:ea typeface="Microsoft JhengHei" panose="020B0604030504040204" pitchFamily="34" charset="-120"/>
-              </a:rPr>
-              <a:t>愛何等大  恩何等深</a:t>
-            </a:r>
-          </a:p>
-          <a:p>
-            <a:pPr marL="0" indent="0" algn="ctr">
-              <a:buNone/>
-            </a:pPr>
-            <a:r>
-              <a:rPr lang="zh-TW" altLang="en-US" sz="5400" b="1" dirty="0">
-                <a:solidFill>
-                  <a:srgbClr val="660033"/>
-                </a:solidFill>
-                <a:latin typeface="Microsoft JhengHei" panose="020B0604030504040204" pitchFamily="34" charset="-120"/>
-                <a:ea typeface="Microsoft JhengHei" panose="020B0604030504040204" pitchFamily="34" charset="-120"/>
-              </a:rPr>
-              <a:t>我要永遠讚主恩</a:t>
-            </a:r>
+              <a:t>( 2 / 5 )</a:t>
+            </a:r>
+            <a:endParaRPr lang="vi-VN" sz="3733" b="1" dirty="0">
+              <a:solidFill>
+                <a:srgbClr val="660033"/>
+              </a:solidFill>
+            </a:endParaRPr>
           </a:p>
         </p:txBody>
       </p:sp>
     </p:spTree>
     <p:extLst>
       <p:ext uri="{BB962C8B-B14F-4D97-AF65-F5344CB8AC3E}">
-        <p14:creationId xmlns:p14="http://schemas.microsoft.com/office/powerpoint/2010/main" val="2199765719"/>
+        <p14:creationId xmlns:p14="http://schemas.microsoft.com/office/powerpoint/2010/main" val="2372253272"/>
       </p:ext>
     </p:extLst>
   </p:cSld>
@@ -5092,186 +5767,89 @@
       </p:grpSpPr>
       <p:sp>
         <p:nvSpPr>
-          <p:cNvPr id="4" name="Title 3"/>
-          <p:cNvSpPr>
-            <a:spLocks noGrp="1"/>
-          </p:cNvSpPr>
-          <p:nvPr>
-            <p:ph type="title"/>
-          </p:nvPr>
-        </p:nvSpPr>
-        <p:spPr/>
-        <p:txBody>
-          <a:bodyPr>
+          <p:cNvPr id="5" name="內容版面配置區 4"/>
+          <p:cNvSpPr>
+            <a:spLocks noGrp="1"/>
+          </p:cNvSpPr>
+          <p:nvPr>
+            <p:ph idx="1"/>
+          </p:nvPr>
+        </p:nvSpPr>
+        <p:spPr>
+          <a:xfrm>
+            <a:off x="0" y="2084851"/>
+            <a:ext cx="12192000" cy="2404863"/>
+          </a:xfrm>
+        </p:spPr>
+        <p:txBody>
+          <a:bodyPr anchor="ctr">
             <a:normAutofit/>
           </a:bodyPr>
           <a:lstStyle/>
           <a:p>
-            <a:r>
-              <a:rPr lang="en-US" altLang="zh-CN" sz="4800" b="1" dirty="0">
+            <a:pPr marL="0" indent="0" algn="ctr">
+              <a:buNone/>
+            </a:pPr>
+            <a:r>
+              <a:rPr lang="zh-TW" altLang="en-US" sz="6400" b="1" dirty="0">
                 <a:solidFill>
                   <a:srgbClr val="660033"/>
                 </a:solidFill>
                 <a:latin typeface="Microsoft JhengHei" panose="020B0604030504040204" pitchFamily="34" charset="-120"/>
                 <a:ea typeface="Microsoft JhengHei" panose="020B0604030504040204" pitchFamily="34" charset="-120"/>
               </a:rPr>
-              <a:t>【</a:t>
-            </a:r>
-            <a:r>
-              <a:rPr lang="zh-CN" altLang="en-US" sz="4800" b="1" dirty="0">
+              <a:t>並非自憐痛哭流涕</a:t>
+            </a:r>
+          </a:p>
+          <a:p>
+            <a:pPr marL="0" indent="0" algn="ctr">
+              <a:buNone/>
+            </a:pPr>
+            <a:r>
+              <a:rPr lang="zh-TW" altLang="en-US" sz="6400" b="1" dirty="0">
                 <a:solidFill>
                   <a:srgbClr val="660033"/>
                 </a:solidFill>
                 <a:latin typeface="Microsoft JhengHei" panose="020B0604030504040204" pitchFamily="34" charset="-120"/>
                 <a:ea typeface="Microsoft JhengHei" panose="020B0604030504040204" pitchFamily="34" charset="-120"/>
               </a:rPr>
-              <a:t>救主的愛</a:t>
-            </a:r>
-            <a:r>
-              <a:rPr lang="en-US" altLang="zh-CN" sz="4800" b="1" dirty="0">
-                <a:solidFill>
-                  <a:srgbClr val="660033"/>
-                </a:solidFill>
-                <a:latin typeface="Microsoft JhengHei" panose="020B0604030504040204" pitchFamily="34" charset="-120"/>
-                <a:ea typeface="Microsoft JhengHei" panose="020B0604030504040204" pitchFamily="34" charset="-120"/>
-              </a:rPr>
-              <a:t>】</a:t>
-            </a:r>
-          </a:p>
-        </p:txBody>
-      </p:sp>
-      <p:sp>
-        <p:nvSpPr>
-          <p:cNvPr id="5" name="Content Placeholder 4"/>
-          <p:cNvSpPr>
-            <a:spLocks noGrp="1"/>
-          </p:cNvSpPr>
-          <p:nvPr>
-            <p:ph idx="1"/>
-          </p:nvPr>
-        </p:nvSpPr>
-        <p:spPr/>
-        <p:txBody>
-          <a:bodyPr>
-            <a:noAutofit/>
-          </a:bodyPr>
-          <a:lstStyle/>
-          <a:p>
-            <a:pPr marL="0" indent="0" algn="ctr">
-              <a:buNone/>
-            </a:pPr>
-            <a:r>
-              <a:rPr lang="zh-CN" altLang="zh-TW" sz="5400" b="1" dirty="0">
-                <a:solidFill>
-                  <a:srgbClr val="660033"/>
-                </a:solidFill>
-                <a:latin typeface="Microsoft JhengHei" panose="020B0604030504040204" pitchFamily="34" charset="-120"/>
-                <a:ea typeface="Microsoft JhengHei" panose="020B0604030504040204" pitchFamily="34" charset="-120"/>
-              </a:rPr>
-              <a:t>擔</a:t>
-            </a:r>
-            <a:r>
-              <a:rPr lang="zh-TW" altLang="en-US" sz="5400" b="1" dirty="0">
-                <a:solidFill>
-                  <a:srgbClr val="660033"/>
-                </a:solidFill>
-                <a:latin typeface="Microsoft JhengHei" panose="020B0604030504040204" pitchFamily="34" charset="-120"/>
-                <a:ea typeface="Microsoft JhengHei" panose="020B0604030504040204" pitchFamily="34" charset="-120"/>
-              </a:rPr>
-              <a:t>當我罪並我苦愁</a:t>
-            </a:r>
-          </a:p>
-          <a:p>
-            <a:pPr marL="0" indent="0" algn="ctr">
-              <a:buNone/>
-            </a:pPr>
-            <a:r>
-              <a:rPr lang="zh-TW" altLang="en-US" sz="5400" b="1" dirty="0">
-                <a:solidFill>
-                  <a:srgbClr val="660033"/>
-                </a:solidFill>
-                <a:latin typeface="Microsoft JhengHei" panose="020B0604030504040204" pitchFamily="34" charset="-120"/>
-                <a:ea typeface="Microsoft JhengHei" panose="020B0604030504040204" pitchFamily="34" charset="-120"/>
-              </a:rPr>
-              <a:t>自己肩負不怨尤</a:t>
-            </a:r>
-          </a:p>
-          <a:p>
-            <a:pPr marL="0" indent="0" algn="ctr">
-              <a:buNone/>
-            </a:pPr>
-            <a:r>
-              <a:rPr lang="zh-TW" altLang="en-US" sz="5400" b="1" dirty="0">
-                <a:solidFill>
-                  <a:srgbClr val="660033"/>
-                </a:solidFill>
-                <a:latin typeface="Microsoft JhengHei" panose="020B0604030504040204" pitchFamily="34" charset="-120"/>
-                <a:ea typeface="Microsoft JhengHei" panose="020B0604030504040204" pitchFamily="34" charset="-120"/>
-              </a:rPr>
-              <a:t>十字架上主流寶血</a:t>
-            </a:r>
-          </a:p>
-          <a:p>
-            <a:pPr marL="0" indent="0" algn="ctr">
-              <a:buNone/>
-            </a:pPr>
-            <a:r>
-              <a:rPr lang="zh-TW" altLang="en-US" sz="5400" b="1" dirty="0">
-                <a:solidFill>
-                  <a:srgbClr val="660033"/>
-                </a:solidFill>
-                <a:latin typeface="Microsoft JhengHei" panose="020B0604030504040204" pitchFamily="34" charset="-120"/>
-                <a:ea typeface="Microsoft JhengHei" panose="020B0604030504040204" pitchFamily="34" charset="-120"/>
-              </a:rPr>
-              <a:t>由死復活勝一切</a:t>
-            </a:r>
-          </a:p>
-        </p:txBody>
-      </p:sp>
-      <p:sp>
-        <p:nvSpPr>
-          <p:cNvPr id="6" name="Text Box 1"/>
+              <a:t>為我血汗流下地</a:t>
+            </a:r>
+          </a:p>
+        </p:txBody>
+      </p:sp>
+      <p:sp>
+        <p:nvSpPr>
+          <p:cNvPr id="3" name="TextBox 2"/>
           <p:cNvSpPr txBox="1"/>
           <p:nvPr/>
         </p:nvSpPr>
         <p:spPr>
           <a:xfrm>
-            <a:off x="1199456" y="1700808"/>
-            <a:ext cx="1161268" cy="923330"/>
+            <a:off x="0" y="5061181"/>
+            <a:ext cx="12192000" cy="666786"/>
           </a:xfrm>
           <a:prstGeom prst="rect">
             <a:avLst/>
           </a:prstGeom>
           <a:noFill/>
-          <a:ln w="9525">
-            <a:noFill/>
-            <a:miter lim="800000"/>
-          </a:ln>
         </p:spPr>
         <p:txBody>
-          <a:bodyPr wrap="square">
+          <a:bodyPr wrap="square" rtlCol="0">
             <a:spAutoFit/>
           </a:bodyPr>
           <a:lstStyle/>
           <a:p>
             <a:pPr algn="ctr"/>
             <a:r>
-              <a:rPr lang="en-US" sz="5400" b="1" dirty="0">
+              <a:rPr lang="en-US" sz="3733" b="1" dirty="0">
                 <a:solidFill>
                   <a:srgbClr val="660033"/>
                 </a:solidFill>
               </a:rPr>
-              <a:t>4</a:t>
-            </a:r>
-            <a:r>
-              <a:rPr lang="en-US" sz="5400" b="1" dirty="0" smtClean="0">
-                <a:solidFill>
-                  <a:srgbClr val="660033"/>
-                </a:solidFill>
-              </a:rPr>
-              <a:t>.</a:t>
-            </a:r>
-            <a:endParaRPr lang="en-US" sz="5400" b="1" dirty="0">
+              <a:t>( 2 / 5 )</a:t>
+            </a:r>
+            <a:endParaRPr lang="vi-VN" sz="3733" b="1" dirty="0">
               <a:solidFill>
                 <a:srgbClr val="660033"/>
               </a:solidFill>
@@ -5282,7 +5860,7 @@
     </p:spTree>
     <p:extLst>
       <p:ext uri="{BB962C8B-B14F-4D97-AF65-F5344CB8AC3E}">
-        <p14:creationId xmlns:p14="http://schemas.microsoft.com/office/powerpoint/2010/main" val="3140874828"/>
+        <p14:creationId xmlns:p14="http://schemas.microsoft.com/office/powerpoint/2010/main" val="2742693197"/>
       </p:ext>
     </p:extLst>
   </p:cSld>
@@ -5311,76 +5889,31 @@
       </p:grpSpPr>
       <p:sp>
         <p:nvSpPr>
-          <p:cNvPr id="4" name="Title 3"/>
-          <p:cNvSpPr>
-            <a:spLocks noGrp="1"/>
-          </p:cNvSpPr>
-          <p:nvPr>
-            <p:ph type="title"/>
-          </p:nvPr>
-        </p:nvSpPr>
-        <p:spPr/>
-        <p:txBody>
-          <a:bodyPr>
+          <p:cNvPr id="5" name="內容版面配置區 4"/>
+          <p:cNvSpPr>
+            <a:spLocks noGrp="1"/>
+          </p:cNvSpPr>
+          <p:nvPr>
+            <p:ph idx="1"/>
+          </p:nvPr>
+        </p:nvSpPr>
+        <p:spPr>
+          <a:xfrm>
+            <a:off x="0" y="2084851"/>
+            <a:ext cx="12192000" cy="2404863"/>
+          </a:xfrm>
+        </p:spPr>
+        <p:txBody>
+          <a:bodyPr anchor="ctr">
             <a:normAutofit/>
           </a:bodyPr>
           <a:lstStyle/>
           <a:p>
-            <a:r>
-              <a:rPr lang="en-US" altLang="zh-CN" sz="4800" b="1" dirty="0">
-                <a:solidFill>
-                  <a:srgbClr val="660033"/>
-                </a:solidFill>
-                <a:latin typeface="Microsoft JhengHei" panose="020B0604030504040204" pitchFamily="34" charset="-120"/>
-                <a:ea typeface="Microsoft JhengHei" panose="020B0604030504040204" pitchFamily="34" charset="-120"/>
-              </a:rPr>
-              <a:t>【</a:t>
-            </a:r>
-            <a:r>
-              <a:rPr lang="zh-CN" altLang="en-US" sz="4800" b="1" dirty="0">
-                <a:solidFill>
-                  <a:srgbClr val="660033"/>
-                </a:solidFill>
-                <a:latin typeface="Microsoft JhengHei" panose="020B0604030504040204" pitchFamily="34" charset="-120"/>
-                <a:ea typeface="Microsoft JhengHei" panose="020B0604030504040204" pitchFamily="34" charset="-120"/>
-              </a:rPr>
-              <a:t>救主的愛</a:t>
-            </a:r>
-            <a:r>
-              <a:rPr lang="en-US" altLang="zh-CN" sz="4800" b="1" dirty="0">
-                <a:solidFill>
-                  <a:srgbClr val="660033"/>
-                </a:solidFill>
-                <a:latin typeface="Microsoft JhengHei" panose="020B0604030504040204" pitchFamily="34" charset="-120"/>
-                <a:ea typeface="Microsoft JhengHei" panose="020B0604030504040204" pitchFamily="34" charset="-120"/>
-              </a:rPr>
-              <a:t>】</a:t>
-            </a:r>
-          </a:p>
-        </p:txBody>
-      </p:sp>
-      <p:sp>
-        <p:nvSpPr>
-          <p:cNvPr id="5" name="Content Placeholder 4"/>
-          <p:cNvSpPr>
-            <a:spLocks noGrp="1"/>
-          </p:cNvSpPr>
-          <p:nvPr>
-            <p:ph idx="1"/>
-          </p:nvPr>
-        </p:nvSpPr>
-        <p:spPr/>
-        <p:txBody>
-          <a:bodyPr>
-            <a:noAutofit/>
-          </a:bodyPr>
-          <a:lstStyle/>
-          <a:p>
             <a:pPr marL="0" indent="0" algn="ctr">
               <a:buNone/>
             </a:pPr>
             <a:r>
-              <a:rPr lang="zh-TW" altLang="en-US" sz="5400" b="1" dirty="0">
+              <a:rPr lang="zh-TW" altLang="en-US" sz="6400" b="1" dirty="0">
                 <a:solidFill>
                   <a:srgbClr val="660033"/>
                 </a:solidFill>
@@ -5395,7 +5928,7 @@
               <a:buNone/>
             </a:pPr>
             <a:r>
-              <a:rPr lang="zh-TW" altLang="en-US" sz="5400" b="1" dirty="0">
+              <a:rPr lang="zh-TW" altLang="en-US" sz="6400" b="1" dirty="0">
                 <a:solidFill>
                   <a:srgbClr val="660033"/>
                 </a:solidFill>
@@ -5405,7 +5938,7 @@
               <a:t>主如此</a:t>
             </a:r>
             <a:r>
-              <a:rPr lang="zh-CN" altLang="zh-TW" sz="5400" b="1" dirty="0">
+              <a:rPr lang="zh-CN" altLang="zh-TW" sz="6400" b="1" dirty="0">
                 <a:solidFill>
                   <a:srgbClr val="660033"/>
                 </a:solidFill>
@@ -5415,7 +5948,7 @@
               <a:t>愛</a:t>
             </a:r>
             <a:r>
-              <a:rPr lang="zh-TW" altLang="en-US" sz="5400" b="1" dirty="0">
+              <a:rPr lang="zh-TW" altLang="en-US" sz="6400" b="1" dirty="0">
                 <a:solidFill>
                   <a:srgbClr val="660033"/>
                 </a:solidFill>
@@ -5425,42 +5958,12 @@
               <a:t>我罪人</a:t>
             </a:r>
           </a:p>
-          <a:p>
-            <a:pPr marL="0" indent="0" algn="ctr">
-              <a:buNone/>
-            </a:pPr>
-            <a:r>
-              <a:rPr lang="zh-TW" altLang="en-US" sz="5400" b="1" dirty="0">
-                <a:solidFill>
-                  <a:srgbClr val="660033"/>
-                </a:solidFill>
-                <a:latin typeface="Microsoft JhengHei" panose="020B0604030504040204" pitchFamily="34" charset="-120"/>
-                <a:ea typeface="Microsoft JhengHei" panose="020B0604030504040204" pitchFamily="34" charset="-120"/>
-              </a:rPr>
-              <a:t>愛何等大  恩何等深</a:t>
-            </a:r>
-          </a:p>
-          <a:p>
-            <a:pPr marL="0" indent="0" algn="ctr">
-              <a:buNone/>
-            </a:pPr>
-            <a:r>
-              <a:rPr lang="zh-TW" altLang="en-US" sz="5400" b="1" dirty="0">
-                <a:solidFill>
-                  <a:srgbClr val="660033"/>
-                </a:solidFill>
-                <a:latin typeface="Microsoft JhengHei" panose="020B0604030504040204" pitchFamily="34" charset="-120"/>
-                <a:ea typeface="Microsoft JhengHei" panose="020B0604030504040204" pitchFamily="34" charset="-120"/>
-              </a:rPr>
-              <a:t>我要永遠讚主恩</a:t>
-            </a:r>
-          </a:p>
         </p:txBody>
       </p:sp>
     </p:spTree>
     <p:extLst>
       <p:ext uri="{BB962C8B-B14F-4D97-AF65-F5344CB8AC3E}">
-        <p14:creationId xmlns:p14="http://schemas.microsoft.com/office/powerpoint/2010/main" val="1157228027"/>
+        <p14:creationId xmlns:p14="http://schemas.microsoft.com/office/powerpoint/2010/main" val="3042315242"/>
       </p:ext>
     </p:extLst>
   </p:cSld>
@@ -5489,187 +5992,61 @@
       </p:grpSpPr>
       <p:sp>
         <p:nvSpPr>
-          <p:cNvPr id="4" name="Title 3"/>
-          <p:cNvSpPr>
-            <a:spLocks noGrp="1"/>
-          </p:cNvSpPr>
-          <p:nvPr>
-            <p:ph type="title"/>
-          </p:nvPr>
-        </p:nvSpPr>
-        <p:spPr/>
-        <p:txBody>
-          <a:bodyPr>
+          <p:cNvPr id="5" name="內容版面配置區 4"/>
+          <p:cNvSpPr>
+            <a:spLocks noGrp="1"/>
+          </p:cNvSpPr>
+          <p:nvPr>
+            <p:ph idx="1"/>
+          </p:nvPr>
+        </p:nvSpPr>
+        <p:spPr>
+          <a:xfrm>
+            <a:off x="0" y="2084851"/>
+            <a:ext cx="12192000" cy="2404863"/>
+          </a:xfrm>
+        </p:spPr>
+        <p:txBody>
+          <a:bodyPr anchor="ctr">
             <a:normAutofit/>
           </a:bodyPr>
           <a:lstStyle/>
           <a:p>
-            <a:r>
-              <a:rPr lang="en-US" altLang="zh-CN" sz="4800" b="1" dirty="0">
+            <a:pPr marL="0" indent="0" algn="ctr">
+              <a:buNone/>
+            </a:pPr>
+            <a:r>
+              <a:rPr lang="zh-TW" altLang="en-US" sz="6400" b="1" dirty="0">
                 <a:solidFill>
                   <a:srgbClr val="660033"/>
                 </a:solidFill>
                 <a:latin typeface="Microsoft JhengHei" panose="020B0604030504040204" pitchFamily="34" charset="-120"/>
                 <a:ea typeface="Microsoft JhengHei" panose="020B0604030504040204" pitchFamily="34" charset="-120"/>
               </a:rPr>
-              <a:t>【</a:t>
-            </a:r>
-            <a:r>
-              <a:rPr lang="zh-CN" altLang="en-US" sz="4800" b="1" dirty="0">
+              <a:t>愛何等大  恩何等深</a:t>
+            </a:r>
+          </a:p>
+          <a:p>
+            <a:pPr marL="0" indent="0" algn="ctr">
+              <a:buNone/>
+            </a:pPr>
+            <a:r>
+              <a:rPr lang="zh-TW" altLang="en-US" sz="6400" b="1" dirty="0">
                 <a:solidFill>
                   <a:srgbClr val="660033"/>
                 </a:solidFill>
                 <a:latin typeface="Microsoft JhengHei" panose="020B0604030504040204" pitchFamily="34" charset="-120"/>
                 <a:ea typeface="Microsoft JhengHei" panose="020B0604030504040204" pitchFamily="34" charset="-120"/>
               </a:rPr>
-              <a:t>救主的愛</a:t>
-            </a:r>
-            <a:r>
-              <a:rPr lang="en-US" altLang="zh-CN" sz="4800" b="1" dirty="0">
-                <a:solidFill>
-                  <a:srgbClr val="660033"/>
-                </a:solidFill>
-                <a:latin typeface="Microsoft JhengHei" panose="020B0604030504040204" pitchFamily="34" charset="-120"/>
-                <a:ea typeface="Microsoft JhengHei" panose="020B0604030504040204" pitchFamily="34" charset="-120"/>
-              </a:rPr>
-              <a:t>】</a:t>
-            </a:r>
-          </a:p>
-        </p:txBody>
-      </p:sp>
-      <p:sp>
-        <p:nvSpPr>
-          <p:cNvPr id="5" name="Content Placeholder 4"/>
-          <p:cNvSpPr>
-            <a:spLocks noGrp="1"/>
-          </p:cNvSpPr>
-          <p:nvPr>
-            <p:ph idx="1"/>
-          </p:nvPr>
-        </p:nvSpPr>
-        <p:spPr/>
-        <p:txBody>
-          <a:bodyPr>
-            <a:noAutofit/>
-          </a:bodyPr>
-          <a:lstStyle/>
-          <a:p>
-            <a:pPr marL="0" indent="0" algn="ctr">
-              <a:buNone/>
-            </a:pPr>
-            <a:r>
-              <a:rPr lang="zh-TW" altLang="en-US" sz="5400" b="1" dirty="0">
-                <a:solidFill>
-                  <a:srgbClr val="660033"/>
-                </a:solidFill>
-                <a:latin typeface="Microsoft JhengHei" panose="020B0604030504040204" pitchFamily="34" charset="-120"/>
-                <a:ea typeface="Microsoft JhengHei" panose="020B0604030504040204" pitchFamily="34" charset="-120"/>
-              </a:rPr>
-              <a:t>同救贖者在榮耀中</a:t>
-            </a:r>
-          </a:p>
-          <a:p>
-            <a:pPr marL="0" indent="0" algn="ctr">
-              <a:buNone/>
-            </a:pPr>
-            <a:r>
-              <a:rPr lang="zh-TW" altLang="en-US" sz="5400" b="1" dirty="0">
-                <a:solidFill>
-                  <a:srgbClr val="660033"/>
-                </a:solidFill>
-                <a:latin typeface="Microsoft JhengHei" panose="020B0604030504040204" pitchFamily="34" charset="-120"/>
-                <a:ea typeface="Microsoft JhengHei" panose="020B0604030504040204" pitchFamily="34" charset="-120"/>
-              </a:rPr>
-              <a:t>見主聖容樂無窮</a:t>
-            </a:r>
-          </a:p>
-          <a:p>
-            <a:pPr marL="0" indent="0" algn="ctr">
-              <a:buNone/>
-            </a:pPr>
-            <a:r>
-              <a:rPr lang="zh-TW" altLang="en-US" sz="5400" b="1" dirty="0">
-                <a:solidFill>
-                  <a:srgbClr val="660033"/>
-                </a:solidFill>
-                <a:latin typeface="Microsoft JhengHei" panose="020B0604030504040204" pitchFamily="34" charset="-120"/>
-                <a:ea typeface="Microsoft JhengHei" panose="020B0604030504040204" pitchFamily="34" charset="-120"/>
-              </a:rPr>
-              <a:t>平安愉快度此永年</a:t>
-            </a:r>
-          </a:p>
-          <a:p>
-            <a:pPr marL="0" indent="0" algn="ctr">
-              <a:buNone/>
-            </a:pPr>
-            <a:r>
-              <a:rPr lang="zh-TW" altLang="en-US" sz="5400" b="1" dirty="0">
-                <a:solidFill>
-                  <a:srgbClr val="660033"/>
-                </a:solidFill>
-                <a:latin typeface="Microsoft JhengHei" panose="020B0604030504040204" pitchFamily="34" charset="-120"/>
-                <a:ea typeface="Microsoft JhengHei" panose="020B0604030504040204" pitchFamily="34" charset="-120"/>
-              </a:rPr>
-              <a:t>高唱主恩愛無邊</a:t>
-            </a:r>
-          </a:p>
-        </p:txBody>
-      </p:sp>
-      <p:sp>
-        <p:nvSpPr>
-          <p:cNvPr id="6" name="Text Box 1"/>
-          <p:cNvSpPr txBox="1"/>
-          <p:nvPr/>
-        </p:nvSpPr>
-        <p:spPr>
-          <a:xfrm>
-            <a:off x="1199456" y="1700808"/>
-            <a:ext cx="1161268" cy="923330"/>
-          </a:xfrm>
-          <a:prstGeom prst="rect">
-            <a:avLst/>
-          </a:prstGeom>
-          <a:noFill/>
-          <a:ln w="9525">
-            <a:noFill/>
-            <a:miter lim="800000"/>
-          </a:ln>
-        </p:spPr>
-        <p:txBody>
-          <a:bodyPr wrap="square">
-            <a:spAutoFit/>
-          </a:bodyPr>
-          <a:lstStyle/>
-          <a:p>
-            <a:pPr algn="ctr"/>
-            <a:r>
-              <a:rPr lang="en-US" sz="5400" b="1" dirty="0">
-                <a:solidFill>
-                  <a:srgbClr val="660033"/>
-                </a:solidFill>
-              </a:rPr>
-              <a:t>5</a:t>
-            </a:r>
-            <a:r>
-              <a:rPr lang="en-US" sz="5400" b="1" dirty="0" smtClean="0">
-                <a:solidFill>
-                  <a:srgbClr val="660033"/>
-                </a:solidFill>
-              </a:rPr>
-              <a:t>.</a:t>
-            </a:r>
-            <a:endParaRPr lang="en-US" sz="5400" b="1" dirty="0">
-              <a:solidFill>
-                <a:srgbClr val="660033"/>
-              </a:solidFill>
-            </a:endParaRPr>
+              <a:t>我要永遠讚主恩</a:t>
+            </a:r>
           </a:p>
         </p:txBody>
       </p:sp>
     </p:spTree>
     <p:extLst>
       <p:ext uri="{BB962C8B-B14F-4D97-AF65-F5344CB8AC3E}">
-        <p14:creationId xmlns:p14="http://schemas.microsoft.com/office/powerpoint/2010/main" val="1949398097"/>
+        <p14:creationId xmlns:p14="http://schemas.microsoft.com/office/powerpoint/2010/main" val="5707260"/>
       </p:ext>
     </p:extLst>
   </p:cSld>
